--- a/demo/小說工作台_新手教學.pptx
+++ b/demo/小說工作台_新手教學.pptx
@@ -17,11 +17,14 @@
     <p:sldId id="265" r:id="rId11"/>
     <p:sldId id="266" r:id="rId12"/>
     <p:sldId id="267" r:id="rId13"/>
+    <p:sldId id="278" r:id="rId29"/>
     <p:sldId id="268" r:id="rId14"/>
     <p:sldId id="269" r:id="rId15"/>
     <p:sldId id="270" r:id="rId16"/>
+    <p:sldId id="279" r:id="rId30"/>
     <p:sldId id="271" r:id="rId17"/>
     <p:sldId id="272" r:id="rId18"/>
+    <p:sldId id="280" r:id="rId31"/>
     <p:sldId id="273" r:id="rId19"/>
     <p:sldId id="274" r:id="rId20"/>
     <p:sldId id="275" r:id="rId21"/>
@@ -577,10 +580,8 @@
           <a:lstStyle/>
           <a:p>
             <a:r>
-              <a:rPr lang="en-US" dirty="0"/>
-              <a:t>這份簡報帶第一次使用小說工作台的人，從安裝、設定 AI，到寫出第一章、管理長篇的伏筆與時間線。畫面截圖都來自專案附的示範書《退婚之後》。</a:t>
-            </a:r>
-            <a:endParaRPr lang="en-US" dirty="0"/>
+              <a:t>這份簡報帶第一次使用小說工作台的人，從安裝、設定 AI，到開書、排章綱、寫出第一章，再到管理長篇的設定、伏筆與時間線。2026-10 更新到 v1.18.0；畫面取自專案附的示範書，按鈕位置可能隨版本微調。</a:t>
+            </a:r>
           </a:p>
         </p:txBody>
       </p:sp>
@@ -841,10 +842,8 @@
           <a:lstStyle/>
           <a:p>
             <a:r>
-              <a:rPr lang="en-US" dirty="0"/>
-              <a:t>設定集越完整，AI 寫出來的東西越不會走樣。角色檔裡的說話方式、禁忌，作者偏好裡的禁用詞，都會在寫稿和審查時被讀到。</a:t>
-            </a:r>
-            <a:endParaRPr lang="en-US" dirty="0"/>
+              <a:t>開新書有兩條路。開書訪談是作者決策：讀者、平台、篇幅、視角都在訪談裡定；用參考書骨架直接開書是拿參考書的文風與結構先長出草案，跳過訪談，沒提到的欄位標待補。兩條路最後都要卷先行、排章綱、寫正文。</a:t>
+            </a:r>
           </a:p>
         </p:txBody>
       </p:sp>
@@ -929,10 +928,8 @@
           <a:lstStyle/>
           <a:p>
             <a:r>
-              <a:rPr lang="en-US" dirty="0"/>
-              <a:t>寫稿前，工作台會先把章綱和已定稿的事實對一次帳，有衝突照定稿寫並在匯報列出。寫完會自動核對章綱：每個情節點有沒有寫到，還會附上正文原句。</a:t>
-            </a:r>
-            <a:endParaRPr lang="en-US" dirty="0"/>
+              <a:t>寫稿前，工作台會先把章綱和已定稿的事實對一次帳，有衝突照定稿寫並在匯報列出。寫完會自動核對章綱：每個情節點有沒有寫到，還會附上正文原句。整章自動流程會再多跑一次本機的文風檢查。</a:t>
+            </a:r>
           </a:p>
         </p:txBody>
       </p:sp>
@@ -1017,10 +1014,8 @@
           <a:lstStyle/>
           <a:p>
             <a:r>
-              <a:rPr lang="en-US" dirty="0"/>
-              <a:t>審查只列意見，不會動稿子。修訂結果也不會直接覆蓋，要你在「修訂對照」逐段選完按套用才寫入；原稿在修訂後被改過的話會擋下套用。</a:t>
-            </a:r>
-            <a:endParaRPr lang="en-US" dirty="0"/>
+              <a:t>審查只列意見，不會動稿子。修訂結果也不會直接覆蓋，要你在「修訂對照」逐段選完按套用才寫入；原稿在修訂後被改過的話會擋下套用。文風檢查只提示偏離，不會自動改稿。</a:t>
+            </a:r>
           </a:p>
         </p:txBody>
       </p:sp>
@@ -1105,10 +1100,8 @@
           <a:lstStyle/>
           <a:p>
             <a:r>
-              <a:rPr lang="en-US" dirty="0"/>
-              <a:t>建議先手動寫幾章，熟悉每一步在做什麼，再用整章自動。勾選意見、套用修訂、搬到正文都是程式做，不用 AI。工作台重開後流程進度還在。</a:t>
-            </a:r>
-            <a:endParaRPr lang="en-US" dirty="0"/>
+              <a:t>整章自動有 10 步，其中 7 步呼叫 AI，文風檢查、自動勾選、全部套用由程式做。建議先手動寫幾章，熟悉每一步在做什麼，再用整章自動。工作台重開後流程進度還在。</a:t>
+            </a:r>
           </a:p>
         </p:txBody>
       </p:sp>
@@ -1281,10 +1274,8 @@
           <a:lstStyle/>
           <a:p>
             <a:r>
-              <a:rPr lang="en-US" dirty="0"/>
-              <a:t>這些表格在每次採用章節時由 AI 回寫，回寫後工作台還會在本機檢查有沒有漏寫。寫新章節時，只會帶跟這一章有關的列，避免上下文塞爆。</a:t>
-            </a:r>
-            <a:endParaRPr lang="en-US" dirty="0"/>
+              <a:t>這些表格在每次採用章節時由 AI 回寫，回寫後工作台還會在本機檢查有沒有漏寫。寫新章節時，只會帶跟這一章有關的列；續寫合約與檢索式記憶會在背景補上長期資訊，避免上下文塞爆。</a:t>
+            </a:r>
           </a:p>
         </p:txBody>
       </p:sp>
@@ -1545,10 +1536,8 @@
           <a:lstStyle/>
           <a:p>
             <a:r>
-              <a:rPr lang="en-US" dirty="0"/>
-              <a:t>工作台是一個網頁介面，但所有東西都在你自己的電腦上。小說資料是普通的 Markdown 檔，用記事本也能打開。最重要的原則：AI 只提案，進正文的每一個字都由你決定。</a:t>
-            </a:r>
-            <a:endParaRPr lang="en-US" dirty="0"/>
+              <a:t>工作台是一個網頁介面，但所有東西都在你自己的電腦上。小說資料是普通的 Markdown 檔，用記事本也能打開。最重要的原則：AI 只提案，進正文的每一個字都由你決定。v1.18 起多了卷先行、設定集生成／安全刪除，以及用參考書骨架直接開書。</a:t>
+            </a:r>
           </a:p>
         </p:txBody>
       </p:sp>
@@ -1721,10 +1710,8 @@
           <a:lstStyle/>
           <a:p>
             <a:r>
-              <a:rPr lang="en-US" dirty="0"/>
-              <a:t>更多問題可以看 README 的「常見問題」，或從左側欄最底下的「回報問題」到 GitHub 開 issue。</a:t>
-            </a:r>
-            <a:endParaRPr lang="en-US" dirty="0"/>
+              <a:t>更多問題可以看左側「說明」的常見問題，或從左側欄最底下的「回報問題」到 GitHub 開 issue。設定集刪除只開放角色、勢力、世界觀與草稿，其他核心檔不給刪。</a:t>
+            </a:r>
           </a:p>
         </p:txBody>
       </p:sp>
@@ -1809,10 +1796,8 @@
           <a:lstStyle/>
           <a:p>
             <a:r>
-              <a:rPr lang="en-US" dirty="0"/>
               <a:t>工作台以 MIT 授權開源。遇到問題或有建議，從工作台左側欄最底下的「回報問題」直接到 GitHub 開 issue。</a:t>
             </a:r>
-            <a:endParaRPr lang="en-US" dirty="0"/>
           </a:p>
         </p:txBody>
       </p:sp>
@@ -1845,6 +1830,216 @@
         <p14:creationId xmlns:p14="http://schemas.microsoft.com/office/powerpoint/2010/main" val="1024086991"/>
       </p:ext>
     </p:extLst>
+  </p:cSld>
+  <p:clrMapOvr>
+    <a:masterClrMapping/>
+  </p:clrMapOvr>
+</p:notes>
+</file>
+
+<file path=ppt/notesSlides/notesSlide23.xml><?xml version="1.0" encoding="utf-8"?>
+<p:notes xmlns:a="http://schemas.openxmlformats.org/drawingml/2006/main" xmlns:p="http://schemas.openxmlformats.org/presentationml/2006/main" xmlns:r="http://schemas.openxmlformats.org/officeDocument/2006/relationships">
+  <p:cSld>
+    <p:spTree>
+      <p:nvGrpSpPr>
+        <p:cNvPr id="1" name=""/>
+        <p:cNvGrpSpPr/>
+        <p:nvPr/>
+      </p:nvGrpSpPr>
+      <p:grpSpPr>
+        <a:xfrm>
+          <a:off x="0" y="0"/>
+          <a:ext cx="0" cy="0"/>
+          <a:chOff x="0" y="0"/>
+          <a:chExt cx="0" cy="0"/>
+        </a:xfrm>
+      </p:grpSpPr>
+      <p:sp>
+        <p:nvSpPr>
+          <p:cNvPr id="2" name="Slide Image Placeholder 1"/>
+          <p:cNvSpPr>
+            <a:spLocks noGrp="1"/>
+          </p:cNvSpPr>
+          <p:nvPr>
+            <p:ph type="sldImg" idx="2"/>
+          </p:nvPr>
+        </p:nvSpPr>
+        <p:spPr/>
+      </p:sp>
+      <p:sp>
+        <p:nvSpPr>
+          <p:cNvPr id="3" name="Notes Placeholder 2"/>
+          <p:cNvSpPr>
+            <a:spLocks noGrp="1"/>
+          </p:cNvSpPr>
+          <p:nvPr>
+            <p:ph type="body" idx="3" sz="quarter"/>
+          </p:nvPr>
+        </p:nvSpPr>
+        <p:spPr/>
+        <p:txBody>
+          <a:bodyPr/>
+          <a:lstStyle/>
+          <a:p>
+            <a:r>
+              <a:t>卷先行上線後有兩個行為改變：整章自動會拒絕不在任何正式卷綱範圍內的章節；續寫合約找不到對應卷時不再退回第一卷。要先在大綱頁開新卷、採用、再排這一卷的章綱。</a:t>
+            </a:r>
+          </a:p>
+        </p:txBody>
+      </p:sp>
+      <p:sp>
+        <p:nvSpPr>
+          <p:cNvPr id="4" name="Slide Number Placeholder 3"/>
+          <p:cNvSpPr>
+            <a:spLocks noGrp="1"/>
+          </p:cNvSpPr>
+          <p:nvPr>
+            <p:ph type="sldNum" idx="5" sz="quarter"/>
+          </p:nvPr>
+        </p:nvSpPr>
+        <p:spPr/>
+      </p:sp>
+    </p:spTree>
+  </p:cSld>
+  <p:clrMapOvr>
+    <a:masterClrMapping/>
+  </p:clrMapOvr>
+</p:notes>
+</file>
+
+<file path=ppt/notesSlides/notesSlide24.xml><?xml version="1.0" encoding="utf-8"?>
+<p:notes xmlns:a="http://schemas.openxmlformats.org/drawingml/2006/main" xmlns:p="http://schemas.openxmlformats.org/presentationml/2006/main" xmlns:r="http://schemas.openxmlformats.org/officeDocument/2006/relationships">
+  <p:cSld>
+    <p:spTree>
+      <p:nvGrpSpPr>
+        <p:cNvPr id="1" name=""/>
+        <p:cNvGrpSpPr/>
+        <p:nvPr/>
+      </p:nvGrpSpPr>
+      <p:grpSpPr>
+        <a:xfrm>
+          <a:off x="0" y="0"/>
+          <a:ext cx="0" cy="0"/>
+          <a:chOff x="0" y="0"/>
+          <a:chExt cx="0" cy="0"/>
+        </a:xfrm>
+      </p:grpSpPr>
+      <p:sp>
+        <p:nvSpPr>
+          <p:cNvPr id="2" name="Slide Image Placeholder 1"/>
+          <p:cNvSpPr>
+            <a:spLocks noGrp="1"/>
+          </p:cNvSpPr>
+          <p:nvPr>
+            <p:ph type="sldImg" idx="2"/>
+          </p:nvPr>
+        </p:nvSpPr>
+        <p:spPr/>
+      </p:sp>
+      <p:sp>
+        <p:nvSpPr>
+          <p:cNvPr id="3" name="Notes Placeholder 2"/>
+          <p:cNvSpPr>
+            <a:spLocks noGrp="1"/>
+          </p:cNvSpPr>
+          <p:nvPr>
+            <p:ph type="body" idx="3" sz="quarter"/>
+          </p:nvPr>
+        </p:nvSpPr>
+        <p:spPr/>
+        <p:txBody>
+          <a:bodyPr/>
+          <a:lstStyle/>
+          <a:p>
+            <a:r>
+              <a:t>設定集越完整，AI 寫出來的東西越不會走樣。角色檔裡的說話方式、禁忌，作者偏好裡的禁用詞，都會在寫稿和審查時被讀到。刪除只開放角色、勢力、世界觀與草稿，而且是移到 .studio/刪除/，需要時可以手動搬回設定資料夾。</a:t>
+            </a:r>
+          </a:p>
+        </p:txBody>
+      </p:sp>
+      <p:sp>
+        <p:nvSpPr>
+          <p:cNvPr id="4" name="Slide Number Placeholder 3"/>
+          <p:cNvSpPr>
+            <a:spLocks noGrp="1"/>
+          </p:cNvSpPr>
+          <p:nvPr>
+            <p:ph type="sldNum" idx="5" sz="quarter"/>
+          </p:nvPr>
+        </p:nvSpPr>
+        <p:spPr/>
+      </p:sp>
+    </p:spTree>
+  </p:cSld>
+  <p:clrMapOvr>
+    <a:masterClrMapping/>
+  </p:clrMapOvr>
+</p:notes>
+</file>
+
+<file path=ppt/notesSlides/notesSlide25.xml><?xml version="1.0" encoding="utf-8"?>
+<p:notes xmlns:a="http://schemas.openxmlformats.org/drawingml/2006/main" xmlns:p="http://schemas.openxmlformats.org/presentationml/2006/main" xmlns:r="http://schemas.openxmlformats.org/officeDocument/2006/relationships">
+  <p:cSld>
+    <p:spTree>
+      <p:nvGrpSpPr>
+        <p:cNvPr id="1" name=""/>
+        <p:cNvGrpSpPr/>
+        <p:nvPr/>
+      </p:nvGrpSpPr>
+      <p:grpSpPr>
+        <a:xfrm>
+          <a:off x="0" y="0"/>
+          <a:ext cx="0" cy="0"/>
+          <a:chOff x="0" y="0"/>
+          <a:chExt cx="0" cy="0"/>
+        </a:xfrm>
+      </p:grpSpPr>
+      <p:sp>
+        <p:nvSpPr>
+          <p:cNvPr id="2" name="Slide Image Placeholder 1"/>
+          <p:cNvSpPr>
+            <a:spLocks noGrp="1"/>
+          </p:cNvSpPr>
+          <p:nvPr>
+            <p:ph type="sldImg" idx="2"/>
+          </p:nvPr>
+        </p:nvSpPr>
+        <p:spPr/>
+      </p:sp>
+      <p:sp>
+        <p:nvSpPr>
+          <p:cNvPr id="3" name="Notes Placeholder 2"/>
+          <p:cNvSpPr>
+            <a:spLocks noGrp="1"/>
+          </p:cNvSpPr>
+          <p:nvPr>
+            <p:ph type="body" idx="3" sz="quarter"/>
+          </p:nvPr>
+        </p:nvSpPr>
+        <p:spPr/>
+        <p:txBody>
+          <a:bodyPr/>
+          <a:lstStyle/>
+          <a:p>
+            <a:r>
+              <a:t>續寫合約是每章開頭一定會帶的 priority 0 區塊；檢索式記憶只帶相關段落；文風閉環用 13 指標看偏離；漂移與自動駕駛在卷末或每 N 章停下來，有問題就 paused。</a:t>
+            </a:r>
+          </a:p>
+        </p:txBody>
+      </p:sp>
+      <p:sp>
+        <p:nvSpPr>
+          <p:cNvPr id="4" name="Slide Number Placeholder 3"/>
+          <p:cNvSpPr>
+            <a:spLocks noGrp="1"/>
+          </p:cNvSpPr>
+          <p:nvPr>
+            <p:ph type="sldNum" idx="5" sz="quarter"/>
+          </p:nvPr>
+        </p:nvSpPr>
+        <p:spPr/>
+      </p:sp>
+    </p:spTree>
   </p:cSld>
   <p:clrMapOvr>
     <a:masterClrMapping/>
@@ -1897,10 +2092,8 @@
           <a:lstStyle/>
           <a:p>
             <a:r>
-              <a:rPr lang="en-US" dirty="0"/>
-              <a:t>整份教學分五段。第一次使用，至少把安裝設定和認識介面走完，然後用示範書試一次寫章節，熟悉候選稿的流程，再開自己的書。</a:t>
-            </a:r>
-            <a:endParaRPr lang="en-US" dirty="0"/>
+              <a:t>整份教學分五段。第一次使用，至少把安裝設定和認識介面走完，然後用示範書試一次寫章節，熟悉候選稿的流程，再開自己的書。v1.18 的卷先行與設定集刪除在第三、四段。</a:t>
+            </a:r>
           </a:p>
         </p:txBody>
       </p:sp>
@@ -2425,10 +2618,8 @@
           <a:lstStyle/>
           <a:p>
             <a:r>
-              <a:rPr lang="en-US" dirty="0"/>
-              <a:t>右下角的按鈕可以打開或收起 AI 面板，面板可以切成窄、一半、寬三種寬度。左上角的搜尋框（Ctrl+K）可以在前文裡找詞。</a:t>
-            </a:r>
-            <a:endParaRPr lang="en-US" dirty="0"/>
+              <a:t>右下角的按鈕可以打開或收起 AI 面板，面板可以切成窄、一半、寬三種寬度。左上角的搜尋框（Ctrl+K）可以在前文裡找詞；左側最底下的「說明」有完整流程與名詞表。</a:t>
+            </a:r>
           </a:p>
         </p:txBody>
       </p:sp>
@@ -3324,6 +3515,10 @@
           </a:solidFill>
           <a:ln/>
         </p:spPr>
+        <p:txBody>
+          <a:bodyPr/>
+          <a:p/>
+        </p:txBody>
       </p:sp>
       <p:sp>
         <p:nvSpPr>
@@ -3392,6 +3587,10 @@
             </a:outerShdw>
           </a:effectLst>
         </p:spPr>
+        <p:txBody>
+          <a:bodyPr/>
+          <a:p/>
+        </p:txBody>
       </p:sp>
       <p:pic>
         <p:nvPicPr>
@@ -3447,7 +3646,7 @@
                   <a:srgbClr val="8A817A"/>
                 </a:solidFill>
               </a:rPr>
-              <a:t>Novel Studio v1.13</a:t>
+              <a:t>Novel Studio v1.18.0</a:t>
             </a:r>
             <a:endParaRPr lang="en-US" sz="1200" dirty="0"/>
           </a:p>
@@ -4212,7 +4411,7 @@
                   <a:schemeClr val="bg1"/>
                 </a:solidFill>
               </a:rPr>
-              <a:t>開一本書到寫出第一章</a:t>
+              <a:t>開書、卷先行，寫出第一章</a:t>
             </a:r>
             <a:endParaRPr lang="en-US" sz="4000" dirty="0"/>
           </a:p>
@@ -4250,7 +4449,7 @@
                   <a:srgbClr val="F2E3D3"/>
                 </a:solidFill>
               </a:rPr>
-              <a:t>設定先打好，AI 寫出來才不會走樣</a:t>
+              <a:t>先定卷與章綱，再讓 AI 寫；設定先打好，才不會走樣</a:t>
             </a:r>
             <a:endParaRPr lang="en-US" sz="1800" dirty="0"/>
           </a:p>
@@ -4304,645 +4503,12 @@
           <a:bodyPr wrap="square" lIns="0" tIns="0" rIns="0" bIns="0" rtlCol="0" anchor="ctr"/>
           <a:lstStyle/>
           <a:p>
-            <a:pPr algn="l" indent="0" marL="0">
-              <a:buNone/>
-            </a:pPr>
-            <a:r>
-              <a:rPr lang="en-US" sz="3000" b="1" dirty="0">
-                <a:solidFill>
-                  <a:schemeClr val="tx1"/>
-                </a:solidFill>
-              </a:rPr>
-              <a:t>開新書的順序</a:t>
-            </a:r>
-            <a:endParaRPr lang="en-US" sz="3000" dirty="0"/>
-          </a:p>
-        </p:txBody>
-      </p:sp>
-      <p:sp>
-        <p:nvSpPr>
-          <p:cNvPr id="3" name="chev-142"/>
-          <p:cNvSpPr/>
-          <p:nvPr/>
-        </p:nvSpPr>
-        <p:spPr>
-          <a:xfrm>
-            <a:off x="548640" y="1280160"/>
-            <a:ext cx="2286000" cy="1051560"/>
-          </a:xfrm>
-          <a:prstGeom prst="chevron">
-            <a:avLst/>
-          </a:prstGeom>
-          <a:solidFill>
-            <a:schemeClr val="accent1"/>
-          </a:solidFill>
-          <a:ln/>
-        </p:spPr>
-      </p:sp>
-      <p:sp>
-        <p:nvSpPr>
-          <p:cNvPr id="4" name="text-143"/>
-          <p:cNvSpPr txBox="1"/>
-          <p:nvPr/>
-        </p:nvSpPr>
-        <p:spPr>
-          <a:xfrm>
-            <a:off x="960120" y="1371600"/>
-            <a:ext cx="1600200" cy="502920"/>
-          </a:xfrm>
-          <a:prstGeom prst="rect">
-            <a:avLst/>
-          </a:prstGeom>
-          <a:noFill/>
-          <a:ln/>
-        </p:spPr>
-        <p:txBody>
-          <a:bodyPr wrap="square" lIns="0" tIns="0" rIns="0" bIns="0" rtlCol="0" anchor="ctr"/>
-          <a:lstStyle/>
-          <a:p>
-            <a:pPr algn="ctr" indent="0" marL="0">
-              <a:buNone/>
-            </a:pPr>
-            <a:r>
-              <a:rPr lang="en-US" sz="1500" b="1" dirty="0">
-                <a:solidFill>
-                  <a:schemeClr val="bg1"/>
-                </a:solidFill>
-              </a:rPr>
-              <a:t>開書訪談</a:t>
-            </a:r>
-            <a:endParaRPr lang="en-US" sz="1500" dirty="0"/>
-          </a:p>
-        </p:txBody>
-      </p:sp>
-      <p:sp>
-        <p:nvSpPr>
-          <p:cNvPr id="5" name="text-144"/>
-          <p:cNvSpPr txBox="1"/>
-          <p:nvPr/>
-        </p:nvSpPr>
-        <p:spPr>
-          <a:xfrm>
-            <a:off x="960120" y="1828800"/>
-            <a:ext cx="1600200" cy="365760"/>
-          </a:xfrm>
-          <a:prstGeom prst="rect">
-            <a:avLst/>
-          </a:prstGeom>
-          <a:noFill/>
-          <a:ln/>
-        </p:spPr>
-        <p:txBody>
-          <a:bodyPr wrap="square" lIns="0" tIns="0" rIns="0" bIns="0" rtlCol="0" anchor="t"/>
-          <a:lstStyle/>
-          <a:p>
-            <a:pPr algn="ctr" indent="0" marL="0">
-              <a:buNone/>
-            </a:pPr>
-            <a:r>
-              <a:rPr lang="en-US" sz="1200" dirty="0">
-                <a:solidFill>
-                  <a:srgbClr val="F2E3D3"/>
-                </a:solidFill>
-              </a:rPr>
-              <a:t>回答 AI 的問題</a:t>
-            </a:r>
-            <a:endParaRPr lang="en-US" sz="1200" dirty="0"/>
-          </a:p>
-        </p:txBody>
-      </p:sp>
-      <p:sp>
-        <p:nvSpPr>
-          <p:cNvPr id="6" name="chev-145"/>
-          <p:cNvSpPr/>
-          <p:nvPr/>
-        </p:nvSpPr>
-        <p:spPr>
-          <a:xfrm>
-            <a:off x="2788920" y="1280160"/>
-            <a:ext cx="2286000" cy="1051560"/>
-          </a:xfrm>
-          <a:prstGeom prst="chevron">
-            <a:avLst/>
-          </a:prstGeom>
-          <a:solidFill>
-            <a:srgbClr val="EADBD3"/>
-          </a:solidFill>
-          <a:ln/>
-        </p:spPr>
-      </p:sp>
-      <p:sp>
-        <p:nvSpPr>
-          <p:cNvPr id="7" name="text-146"/>
-          <p:cNvSpPr txBox="1"/>
-          <p:nvPr/>
-        </p:nvSpPr>
-        <p:spPr>
-          <a:xfrm>
-            <a:off x="3200400" y="1371600"/>
-            <a:ext cx="1600200" cy="502920"/>
-          </a:xfrm>
-          <a:prstGeom prst="rect">
-            <a:avLst/>
-          </a:prstGeom>
-          <a:noFill/>
-          <a:ln/>
-        </p:spPr>
-        <p:txBody>
-          <a:bodyPr wrap="square" lIns="0" tIns="0" rIns="0" bIns="0" rtlCol="0" anchor="ctr"/>
-          <a:lstStyle/>
-          <a:p>
-            <a:pPr algn="ctr" indent="0" marL="0">
-              <a:buNone/>
-            </a:pPr>
-            <a:r>
-              <a:rPr lang="en-US" sz="1500" b="1" dirty="0">
-                <a:solidFill>
-                  <a:schemeClr val="tx1"/>
-                </a:solidFill>
-              </a:rPr>
-              <a:t>故事核心與文風</a:t>
-            </a:r>
-            <a:endParaRPr lang="en-US" sz="1500" dirty="0"/>
-          </a:p>
-        </p:txBody>
-      </p:sp>
-      <p:sp>
-        <p:nvSpPr>
-          <p:cNvPr id="8" name="text-147"/>
-          <p:cNvSpPr txBox="1"/>
-          <p:nvPr/>
-        </p:nvSpPr>
-        <p:spPr>
-          <a:xfrm>
-            <a:off x="3200400" y="1828800"/>
-            <a:ext cx="1600200" cy="365760"/>
-          </a:xfrm>
-          <a:prstGeom prst="rect">
-            <a:avLst/>
-          </a:prstGeom>
-          <a:noFill/>
-          <a:ln/>
-        </p:spPr>
-        <p:txBody>
-          <a:bodyPr wrap="square" lIns="0" tIns="0" rIns="0" bIns="0" rtlCol="0" anchor="t"/>
-          <a:lstStyle/>
-          <a:p>
-            <a:pPr algn="ctr" indent="0" marL="0">
-              <a:buNone/>
-            </a:pPr>
-            <a:r>
-              <a:rPr lang="en-US" sz="1200" dirty="0">
-                <a:solidFill>
-                  <a:srgbClr val="6B6258"/>
-                </a:solidFill>
-              </a:rPr>
-              <a:t>一句話、主線、語氣</a:t>
-            </a:r>
-            <a:endParaRPr lang="en-US" sz="1200" dirty="0"/>
-          </a:p>
-        </p:txBody>
-      </p:sp>
-      <p:sp>
-        <p:nvSpPr>
-          <p:cNvPr id="9" name="chev-148"/>
-          <p:cNvSpPr/>
-          <p:nvPr/>
-        </p:nvSpPr>
-        <p:spPr>
-          <a:xfrm>
-            <a:off x="5029200" y="1280160"/>
-            <a:ext cx="2286000" cy="1051560"/>
-          </a:xfrm>
-          <a:prstGeom prst="chevron">
-            <a:avLst/>
-          </a:prstGeom>
-          <a:solidFill>
-            <a:srgbClr val="EADBD3"/>
-          </a:solidFill>
-          <a:ln/>
-        </p:spPr>
-      </p:sp>
-      <p:sp>
-        <p:nvSpPr>
-          <p:cNvPr id="10" name="text-149"/>
-          <p:cNvSpPr txBox="1"/>
-          <p:nvPr/>
-        </p:nvSpPr>
-        <p:spPr>
-          <a:xfrm>
-            <a:off x="5440680" y="1371600"/>
-            <a:ext cx="1600200" cy="502920"/>
-          </a:xfrm>
-          <a:prstGeom prst="rect">
-            <a:avLst/>
-          </a:prstGeom>
-          <a:noFill/>
-          <a:ln/>
-        </p:spPr>
-        <p:txBody>
-          <a:bodyPr wrap="square" lIns="0" tIns="0" rIns="0" bIns="0" rtlCol="0" anchor="ctr"/>
-          <a:lstStyle/>
-          <a:p>
-            <a:pPr algn="ctr" indent="0" marL="0">
-              <a:buNone/>
-            </a:pPr>
-            <a:r>
-              <a:rPr lang="en-US" sz="1500" b="1" dirty="0">
-                <a:solidFill>
-                  <a:schemeClr val="tx1"/>
-                </a:solidFill>
-              </a:rPr>
-              <a:t>角色與設定集</a:t>
-            </a:r>
-            <a:endParaRPr lang="en-US" sz="1500" dirty="0"/>
-          </a:p>
-        </p:txBody>
-      </p:sp>
-      <p:sp>
-        <p:nvSpPr>
-          <p:cNvPr id="11" name="text-150"/>
-          <p:cNvSpPr txBox="1"/>
-          <p:nvPr/>
-        </p:nvSpPr>
-        <p:spPr>
-          <a:xfrm>
-            <a:off x="5440680" y="1828800"/>
-            <a:ext cx="1600200" cy="365760"/>
-          </a:xfrm>
-          <a:prstGeom prst="rect">
-            <a:avLst/>
-          </a:prstGeom>
-          <a:noFill/>
-          <a:ln/>
-        </p:spPr>
-        <p:txBody>
-          <a:bodyPr wrap="square" lIns="0" tIns="0" rIns="0" bIns="0" rtlCol="0" anchor="t"/>
-          <a:lstStyle/>
-          <a:p>
-            <a:pPr algn="ctr" indent="0" marL="0">
-              <a:buNone/>
-            </a:pPr>
-            <a:r>
-              <a:rPr lang="en-US" sz="1200" dirty="0">
-                <a:solidFill>
-                  <a:srgbClr val="6B6258"/>
-                </a:solidFill>
-              </a:rPr>
-              <a:t>人物、勢力、世界觀</a:t>
-            </a:r>
-            <a:endParaRPr lang="en-US" sz="1200" dirty="0"/>
-          </a:p>
-        </p:txBody>
-      </p:sp>
-      <p:sp>
-        <p:nvSpPr>
-          <p:cNvPr id="12" name="chev-151"/>
-          <p:cNvSpPr/>
-          <p:nvPr/>
-        </p:nvSpPr>
-        <p:spPr>
-          <a:xfrm>
-            <a:off x="7269480" y="1280160"/>
-            <a:ext cx="2286000" cy="1051560"/>
-          </a:xfrm>
-          <a:prstGeom prst="chevron">
-            <a:avLst/>
-          </a:prstGeom>
-          <a:solidFill>
-            <a:srgbClr val="EADBD3"/>
-          </a:solidFill>
-          <a:ln/>
-        </p:spPr>
-      </p:sp>
-      <p:sp>
-        <p:nvSpPr>
-          <p:cNvPr id="13" name="text-152"/>
-          <p:cNvSpPr txBox="1"/>
-          <p:nvPr/>
-        </p:nvSpPr>
-        <p:spPr>
-          <a:xfrm>
-            <a:off x="7680960" y="1371600"/>
-            <a:ext cx="1600200" cy="502920"/>
-          </a:xfrm>
-          <a:prstGeom prst="rect">
-            <a:avLst/>
-          </a:prstGeom>
-          <a:noFill/>
-          <a:ln/>
-        </p:spPr>
-        <p:txBody>
-          <a:bodyPr wrap="square" lIns="0" tIns="0" rIns="0" bIns="0" rtlCol="0" anchor="ctr"/>
-          <a:lstStyle/>
-          <a:p>
-            <a:pPr algn="ctr" indent="0" marL="0">
-              <a:buNone/>
-            </a:pPr>
-            <a:r>
-              <a:rPr lang="en-US" sz="1500" b="1" dirty="0">
-                <a:solidFill>
-                  <a:schemeClr val="tx1"/>
-                </a:solidFill>
-              </a:rPr>
-              <a:t>全書大綱、卷綱</a:t>
-            </a:r>
-            <a:endParaRPr lang="en-US" sz="1500" dirty="0"/>
-          </a:p>
-        </p:txBody>
-      </p:sp>
-      <p:sp>
-        <p:nvSpPr>
-          <p:cNvPr id="14" name="text-153"/>
-          <p:cNvSpPr txBox="1"/>
-          <p:nvPr/>
-        </p:nvSpPr>
-        <p:spPr>
-          <a:xfrm>
-            <a:off x="7680960" y="1828800"/>
-            <a:ext cx="1600200" cy="365760"/>
-          </a:xfrm>
-          <a:prstGeom prst="rect">
-            <a:avLst/>
-          </a:prstGeom>
-          <a:noFill/>
-          <a:ln/>
-        </p:spPr>
-        <p:txBody>
-          <a:bodyPr wrap="square" lIns="0" tIns="0" rIns="0" bIns="0" rtlCol="0" anchor="t"/>
-          <a:lstStyle/>
-          <a:p>
-            <a:pPr algn="ctr" indent="0" marL="0">
-              <a:buNone/>
-            </a:pPr>
-            <a:r>
-              <a:rPr lang="en-US" sz="1200" dirty="0">
-                <a:solidFill>
-                  <a:srgbClr val="6B6258"/>
-                </a:solidFill>
-              </a:rPr>
-              <a:t>先看提案再確認</a:t>
-            </a:r>
-            <a:endParaRPr lang="en-US" sz="1200" dirty="0"/>
-          </a:p>
-        </p:txBody>
-      </p:sp>
-      <p:sp>
-        <p:nvSpPr>
-          <p:cNvPr id="15" name="chev-154"/>
-          <p:cNvSpPr/>
-          <p:nvPr/>
-        </p:nvSpPr>
-        <p:spPr>
-          <a:xfrm>
-            <a:off x="9509760" y="1280160"/>
-            <a:ext cx="2286000" cy="1051560"/>
-          </a:xfrm>
-          <a:prstGeom prst="chevron">
-            <a:avLst/>
-          </a:prstGeom>
-          <a:solidFill>
-            <a:srgbClr val="EADBD3"/>
-          </a:solidFill>
-          <a:ln/>
-        </p:spPr>
-      </p:sp>
-      <p:sp>
-        <p:nvSpPr>
-          <p:cNvPr id="16" name="text-155"/>
-          <p:cNvSpPr txBox="1"/>
-          <p:nvPr/>
-        </p:nvSpPr>
-        <p:spPr>
-          <a:xfrm>
-            <a:off x="9921240" y="1371600"/>
-            <a:ext cx="1600200" cy="502920"/>
-          </a:xfrm>
-          <a:prstGeom prst="rect">
-            <a:avLst/>
-          </a:prstGeom>
-          <a:noFill/>
-          <a:ln/>
-        </p:spPr>
-        <p:txBody>
-          <a:bodyPr wrap="square" lIns="0" tIns="0" rIns="0" bIns="0" rtlCol="0" anchor="ctr"/>
-          <a:lstStyle/>
-          <a:p>
-            <a:pPr algn="ctr" indent="0" marL="0">
-              <a:buNone/>
-            </a:pPr>
-            <a:r>
-              <a:rPr lang="en-US" sz="1500" b="1" dirty="0">
-                <a:solidFill>
-                  <a:schemeClr val="tx1"/>
-                </a:solidFill>
-              </a:rPr>
-              <a:t>排章綱</a:t>
-            </a:r>
-            <a:endParaRPr lang="en-US" sz="1500" dirty="0"/>
-          </a:p>
-        </p:txBody>
-      </p:sp>
-      <p:sp>
-        <p:nvSpPr>
-          <p:cNvPr id="17" name="text-156"/>
-          <p:cNvSpPr txBox="1"/>
-          <p:nvPr/>
-        </p:nvSpPr>
-        <p:spPr>
-          <a:xfrm>
-            <a:off x="9921240" y="1828800"/>
-            <a:ext cx="1600200" cy="365760"/>
-          </a:xfrm>
-          <a:prstGeom prst="rect">
-            <a:avLst/>
-          </a:prstGeom>
-          <a:noFill/>
-          <a:ln/>
-        </p:spPr>
-        <p:txBody>
-          <a:bodyPr wrap="square" lIns="0" tIns="0" rIns="0" bIns="0" rtlCol="0" anchor="t"/>
-          <a:lstStyle/>
-          <a:p>
-            <a:pPr algn="ctr" indent="0" marL="0">
-              <a:buNone/>
-            </a:pPr>
-            <a:r>
-              <a:rPr lang="en-US" sz="1200" dirty="0">
-                <a:solidFill>
-                  <a:srgbClr val="6B6258"/>
-                </a:solidFill>
-              </a:rPr>
-              <a:t>每章的情節點</a:t>
-            </a:r>
-            <a:endParaRPr lang="en-US" sz="1200" dirty="0"/>
-          </a:p>
-        </p:txBody>
-      </p:sp>
-      <p:sp>
-        <p:nvSpPr>
-          <p:cNvPr id="18" name="text-157"/>
-          <p:cNvSpPr txBox="1"/>
-          <p:nvPr/>
-        </p:nvSpPr>
-        <p:spPr>
-          <a:xfrm>
-            <a:off x="548640" y="2697480"/>
-            <a:ext cx="4937760" cy="3566160"/>
-          </a:xfrm>
-          <a:prstGeom prst="rect">
-            <a:avLst/>
-          </a:prstGeom>
-          <a:noFill/>
-          <a:ln/>
-        </p:spPr>
-        <p:txBody>
-          <a:bodyPr wrap="square" lIns="0" tIns="0" rIns="0" bIns="0" rtlCol="0" anchor="t"/>
-          <a:lstStyle/>
-          <a:p>
-            <a:pPr indent="0" marL="0">
-              <a:buNone/>
-            </a:pPr>
-            <a:r>
-              <a:rPr lang="en-US" sz="1700" b="1" dirty="0">
-                <a:solidFill>
-                  <a:schemeClr val="tx1"/>
-                </a:solidFill>
-              </a:rPr>
-              <a:t>怎麼開始</a:t>
-            </a:r>
-            <a:endParaRPr lang="en-US" sz="1500" dirty="0"/>
-          </a:p>
-          <a:p>
-            <a:pPr marL="203200" indent="-203200">
-              <a:spcAft>
-                <a:spcPts val="600"/>
-              </a:spcAft>
-              <a:buSzPct val="100000"/>
-              <a:buChar char="•"/>
-            </a:pPr>
-            <a:r>
-              <a:rPr lang="en-US" sz="1400" dirty="0">
-                <a:solidFill>
-                  <a:srgbClr val="3F3833"/>
-                </a:solidFill>
-              </a:rPr>
-              <a:t>書架按「開新書」，填書名和一句構想，會自動開始開書訪談</a:t>
-            </a:r>
-            <a:endParaRPr lang="en-US" sz="1500" dirty="0"/>
-          </a:p>
-          <a:p>
-            <a:pPr marL="203200" indent="-203200">
-              <a:spcAft>
-                <a:spcPts val="600"/>
-              </a:spcAft>
-              <a:buSzPct val="100000"/>
-              <a:buChar char="•"/>
-            </a:pPr>
-            <a:r>
-              <a:rPr lang="en-US" sz="1400" dirty="0">
-                <a:solidFill>
-                  <a:srgbClr val="3F3833"/>
-                </a:solidFill>
-              </a:rPr>
-              <a:t>之後每一步都在右側 AI 面板按對應的按鈕</a:t>
-            </a:r>
-            <a:endParaRPr lang="en-US" sz="1500" dirty="0"/>
-          </a:p>
-          <a:p>
-            <a:pPr marL="203200" indent="-203200">
-              <a:spcAft>
-                <a:spcPts val="600"/>
-              </a:spcAft>
-              <a:buSzPct val="100000"/>
-              <a:buChar char="•"/>
-            </a:pPr>
-            <a:r>
-              <a:rPr lang="en-US" sz="1400" dirty="0">
-                <a:solidFill>
-                  <a:srgbClr val="3F3833"/>
-                </a:solidFill>
-              </a:rPr>
-              <a:t>全書大綱、卷綱、排章綱會先給提案，你在面板回覆「確認」才寫入</a:t>
-            </a:r>
-            <a:endParaRPr lang="en-US" sz="1500" dirty="0"/>
-          </a:p>
-          <a:p>
-            <a:pPr marL="203200" indent="-203200">
-              <a:spcAft>
-                <a:spcPts val="600"/>
-              </a:spcAft>
-              <a:buSzPct val="100000"/>
-              <a:buChar char="•"/>
-            </a:pPr>
-            <a:r>
-              <a:rPr lang="en-US" sz="1400" dirty="0">
-                <a:solidFill>
-                  <a:srgbClr val="3F3833"/>
-                </a:solidFill>
-              </a:rPr>
-              <a:t>AI 生成的設定先放「草稿」，看過再按「草稿轉正式」</a:t>
-            </a:r>
-            <a:endParaRPr lang="en-US" sz="1500" dirty="0"/>
-          </a:p>
-        </p:txBody>
-      </p:sp>
-      <p:sp>
-        <p:nvSpPr>
-          <p:cNvPr id="19" name="shot-frame-158"/>
-          <p:cNvSpPr/>
-          <p:nvPr/>
-        </p:nvSpPr>
-        <p:spPr>
-          <a:xfrm>
-            <a:off x="5760720" y="2697480"/>
-            <a:ext cx="5705856" cy="3566160"/>
-          </a:xfrm>
-          <a:prstGeom prst="rect">
-            <a:avLst/>
-          </a:prstGeom>
-          <a:solidFill>
-            <a:schemeClr val="bg1"/>
-          </a:solidFill>
-          <a:ln w="9525">
-            <a:solidFill>
-              <a:srgbClr val="D9D1C7"/>
-            </a:solidFill>
-            <a:prstDash val="solid"/>
-          </a:ln>
-          <a:effectLst>
-            <a:outerShdw sx="100000" sy="100000" kx="0" ky="0" algn="bl" rotWithShape="0" blurRad="101600" dist="38100" dir="5400000">
-              <a:srgbClr val="000000">
-                <a:alpha val="18000"/>
-              </a:srgbClr>
-            </a:outerShdw>
-          </a:effectLst>
-        </p:spPr>
-      </p:sp>
-      <p:pic>
-        <p:nvPicPr>
-          <p:cNvPr id="20" name="shot-159" descr="設定集頁">    </p:cNvPr>
-          <p:cNvPicPr>
-            <a:picLocks noChangeAspect="1"/>
-          </p:cNvPicPr>
-          <p:nvPr/>
-        </p:nvPicPr>
-        <p:blipFill>
-          <a:blip r:embed="rId1"/>
-          <a:stretch>
-            <a:fillRect/>
-          </a:stretch>
-        </p:blipFill>
-        <p:spPr>
-          <a:xfrm>
-            <a:off x="5760720" y="2697480"/>
-            <a:ext cx="5705856" cy="3566160"/>
-          </a:xfrm>
-          <a:prstGeom prst="rect">
-            <a:avLst/>
-          </a:prstGeom>
-        </p:spPr>
-      </p:pic>
+            <a:r>
+              <a:t>開新書：兩種方式</a:t>
+            </a:r>
+          </a:p>
+        </p:txBody>
+      </p:sp>
       <p:sp>
         <p:nvSpPr>
           <p:cNvPr id="25" name="Slide Number Placeholder 0"/>
@@ -4985,6 +4551,638 @@
               <a:t>12</a:t>
             </a:fld>
             <a:endParaRPr lang="en-US"/>
+          </a:p>
+        </p:txBody>
+      </p:sp>
+      <p:sp>
+        <p:nvSpPr>
+          <p:cNvPr id="26" name="TextBox 25"/>
+          <p:cNvSpPr txBox="1"/>
+          <p:nvPr/>
+        </p:nvSpPr>
+        <p:spPr>
+          <a:xfrm>
+            <a:off x="548640" y="1024128"/>
+            <a:ext cx="11064240" cy="310896"/>
+          </a:xfrm>
+          <a:prstGeom prst="rect">
+            <a:avLst/>
+          </a:prstGeom>
+          <a:noFill/>
+        </p:spPr>
+        <p:txBody>
+          <a:bodyPr wrap="square" lIns="0" rIns="0" tIns="0" bIns="0" anchor="t">
+            <a:spAutoFit/>
+          </a:bodyPr>
+          <a:lstStyle/>
+          <a:p>
+            <a:pPr algn="l">
+              <a:lnSpc>
+                <a:spcPct val="112000"/>
+              </a:lnSpc>
+              <a:spcAft>
+                <a:spcPts val="300"/>
+              </a:spcAft>
+            </a:pPr>
+            <a:r>
+              <a:rPr sz="1300" b="0">
+                <a:solidFill>
+                  <a:srgbClr val="6B6258"/>
+                </a:solidFill>
+                <a:latin typeface="Microsoft JhengHei"/>
+              </a:rPr>
+              <a:t>先選一條路；之後都會接到卷先行與章綱</a:t>
+            </a:r>
+          </a:p>
+        </p:txBody>
+      </p:sp>
+      <p:sp>
+        <p:nvSpPr>
+          <p:cNvPr id="27" name="Rounded Rectangle 26"/>
+          <p:cNvSpPr/>
+          <p:nvPr/>
+        </p:nvSpPr>
+        <p:spPr>
+          <a:xfrm>
+            <a:off x="548640" y="1481328"/>
+            <a:ext cx="5394960" cy="3246120"/>
+          </a:xfrm>
+          <a:prstGeom prst="roundRect">
+            <a:avLst/>
+          </a:prstGeom>
+          <a:solidFill>
+            <a:srgbClr val="8A3B2E"/>
+          </a:solidFill>
+          <a:ln>
+            <a:noFill/>
+          </a:ln>
+          <a:effectLst/>
+        </p:spPr>
+        <p:style>
+          <a:lnRef idx="1">
+            <a:schemeClr val="accent1"/>
+          </a:lnRef>
+          <a:fillRef idx="3">
+            <a:schemeClr val="accent1"/>
+          </a:fillRef>
+          <a:effectRef idx="2">
+            <a:schemeClr val="accent1"/>
+          </a:effectRef>
+          <a:fontRef idx="minor">
+            <a:schemeClr val="lt1"/>
+          </a:fontRef>
+        </p:style>
+        <p:txBody>
+          <a:bodyPr rtlCol="0" anchor="ctr"/>
+          <a:lstStyle/>
+          <a:p>
+            <a:pPr algn="ctr"/>
+          </a:p>
+        </p:txBody>
+      </p:sp>
+      <p:sp>
+        <p:nvSpPr>
+          <p:cNvPr id="28" name="TextBox 27"/>
+          <p:cNvSpPr txBox="1"/>
+          <p:nvPr/>
+        </p:nvSpPr>
+        <p:spPr>
+          <a:xfrm>
+            <a:off x="841248" y="1700784"/>
+            <a:ext cx="4846320" cy="457200"/>
+          </a:xfrm>
+          <a:prstGeom prst="rect">
+            <a:avLst/>
+          </a:prstGeom>
+          <a:noFill/>
+        </p:spPr>
+        <p:txBody>
+          <a:bodyPr wrap="square" lIns="0" rIns="0" tIns="0" bIns="0" anchor="t">
+            <a:spAutoFit/>
+          </a:bodyPr>
+          <a:lstStyle/>
+          <a:p>
+            <a:pPr algn="l">
+              <a:lnSpc>
+                <a:spcPct val="112000"/>
+              </a:lnSpc>
+              <a:spcAft>
+                <a:spcPts val="300"/>
+              </a:spcAft>
+            </a:pPr>
+            <a:r>
+              <a:rPr sz="2200" b="1">
+                <a:solidFill>
+                  <a:srgbClr val="FFFFFF"/>
+                </a:solidFill>
+                <a:latin typeface="Microsoft JhengHei"/>
+              </a:rPr>
+              <a:t>開書訪談</a:t>
+            </a:r>
+          </a:p>
+        </p:txBody>
+      </p:sp>
+      <p:sp>
+        <p:nvSpPr>
+          <p:cNvPr id="29" name="TextBox 28"/>
+          <p:cNvSpPr txBox="1"/>
+          <p:nvPr/>
+        </p:nvSpPr>
+        <p:spPr>
+          <a:xfrm>
+            <a:off x="841248" y="2157984"/>
+            <a:ext cx="4846320" cy="329184"/>
+          </a:xfrm>
+          <a:prstGeom prst="rect">
+            <a:avLst/>
+          </a:prstGeom>
+          <a:noFill/>
+        </p:spPr>
+        <p:txBody>
+          <a:bodyPr wrap="square" lIns="0" rIns="0" tIns="0" bIns="0" anchor="t">
+            <a:spAutoFit/>
+          </a:bodyPr>
+          <a:lstStyle/>
+          <a:p>
+            <a:pPr algn="l">
+              <a:lnSpc>
+                <a:spcPct val="112000"/>
+              </a:lnSpc>
+              <a:spcAft>
+                <a:spcPts val="300"/>
+              </a:spcAft>
+            </a:pPr>
+            <a:r>
+              <a:rPr sz="1300" b="0">
+                <a:solidFill>
+                  <a:srgbClr val="F2E3D3"/>
+                </a:solidFill>
+                <a:latin typeface="Microsoft JhengHei"/>
+              </a:rPr>
+              <a:t>推薦第一次用</a:t>
+            </a:r>
+          </a:p>
+        </p:txBody>
+      </p:sp>
+      <p:sp>
+        <p:nvSpPr>
+          <p:cNvPr id="30" name="TextBox 29"/>
+          <p:cNvSpPr txBox="1"/>
+          <p:nvPr/>
+        </p:nvSpPr>
+        <p:spPr>
+          <a:xfrm>
+            <a:off x="841248" y="2615184"/>
+            <a:ext cx="4754880" cy="1097280"/>
+          </a:xfrm>
+          <a:prstGeom prst="rect">
+            <a:avLst/>
+          </a:prstGeom>
+          <a:noFill/>
+        </p:spPr>
+        <p:txBody>
+          <a:bodyPr wrap="square" lIns="0" rIns="0" tIns="0" bIns="0" anchor="t">
+            <a:spAutoFit/>
+          </a:bodyPr>
+          <a:lstStyle/>
+          <a:p>
+            <a:pPr algn="l">
+              <a:lnSpc>
+                <a:spcPct val="118000"/>
+              </a:lnSpc>
+              <a:spcAft>
+                <a:spcPts val="300"/>
+              </a:spcAft>
+            </a:pPr>
+            <a:r>
+              <a:rPr sz="1300" b="0">
+                <a:solidFill>
+                  <a:srgbClr val="FFFFFF"/>
+                </a:solidFill>
+                <a:latin typeface="Microsoft JhengHei"/>
+              </a:rPr>
+              <a:t>兩輪問答，把故事核心、讀者、篇幅、視角定下來。</a:t>
+            </a:r>
+          </a:p>
+          <a:p>
+            <a:pPr algn="l">
+              <a:lnSpc>
+                <a:spcPct val="118000"/>
+              </a:lnSpc>
+              <a:spcAft>
+                <a:spcPts val="300"/>
+              </a:spcAft>
+            </a:pPr>
+            <a:r>
+              <a:rPr sz="1300" b="0">
+                <a:solidFill>
+                  <a:srgbClr val="FFFFFF"/>
+                </a:solidFill>
+                <a:latin typeface="Microsoft JhengHei"/>
+              </a:rPr>
+              <a:t>完成後才寫 CLAUDE.md、故事核心、文風。</a:t>
+            </a:r>
+          </a:p>
+        </p:txBody>
+      </p:sp>
+      <p:sp>
+        <p:nvSpPr>
+          <p:cNvPr id="31" name="TextBox 30"/>
+          <p:cNvSpPr txBox="1"/>
+          <p:nvPr/>
+        </p:nvSpPr>
+        <p:spPr>
+          <a:xfrm>
+            <a:off x="841248" y="3822191"/>
+            <a:ext cx="4754880" cy="640080"/>
+          </a:xfrm>
+          <a:prstGeom prst="rect">
+            <a:avLst/>
+          </a:prstGeom>
+          <a:noFill/>
+        </p:spPr>
+        <p:txBody>
+          <a:bodyPr wrap="square" lIns="0" rIns="0" tIns="0" bIns="0" anchor="t">
+            <a:spAutoFit/>
+          </a:bodyPr>
+          <a:lstStyle/>
+          <a:p>
+            <a:pPr algn="l">
+              <a:lnSpc>
+                <a:spcPct val="112000"/>
+              </a:lnSpc>
+              <a:spcAft>
+                <a:spcPts val="300"/>
+              </a:spcAft>
+            </a:pPr>
+            <a:r>
+              <a:rPr sz="1200" b="0">
+                <a:solidFill>
+                  <a:srgbClr val="F2E3D3"/>
+                </a:solidFill>
+                <a:latin typeface="Microsoft JhengHei"/>
+              </a:rPr>
+              <a:t>適合：只有一句構想，還沒有完整設定。</a:t>
+            </a:r>
+          </a:p>
+        </p:txBody>
+      </p:sp>
+      <p:sp>
+        <p:nvSpPr>
+          <p:cNvPr id="32" name="Rounded Rectangle 31"/>
+          <p:cNvSpPr/>
+          <p:nvPr/>
+        </p:nvSpPr>
+        <p:spPr>
+          <a:xfrm>
+            <a:off x="6172200" y="1481328"/>
+            <a:ext cx="5468112" cy="3246120"/>
+          </a:xfrm>
+          <a:prstGeom prst="roundRect">
+            <a:avLst/>
+          </a:prstGeom>
+          <a:solidFill>
+            <a:srgbClr val="F3E6DF"/>
+          </a:solidFill>
+          <a:ln>
+            <a:noFill/>
+          </a:ln>
+          <a:effectLst/>
+        </p:spPr>
+        <p:style>
+          <a:lnRef idx="1">
+            <a:schemeClr val="accent1"/>
+          </a:lnRef>
+          <a:fillRef idx="3">
+            <a:schemeClr val="accent1"/>
+          </a:fillRef>
+          <a:effectRef idx="2">
+            <a:schemeClr val="accent1"/>
+          </a:effectRef>
+          <a:fontRef idx="minor">
+            <a:schemeClr val="lt1"/>
+          </a:fontRef>
+        </p:style>
+        <p:txBody>
+          <a:bodyPr rtlCol="0" anchor="ctr"/>
+          <a:lstStyle/>
+          <a:p>
+            <a:pPr algn="ctr"/>
+          </a:p>
+        </p:txBody>
+      </p:sp>
+      <p:sp>
+        <p:nvSpPr>
+          <p:cNvPr id="33" name="TextBox 32"/>
+          <p:cNvSpPr txBox="1"/>
+          <p:nvPr/>
+        </p:nvSpPr>
+        <p:spPr>
+          <a:xfrm>
+            <a:off x="6464808" y="1700784"/>
+            <a:ext cx="4846320" cy="457200"/>
+          </a:xfrm>
+          <a:prstGeom prst="rect">
+            <a:avLst/>
+          </a:prstGeom>
+          <a:noFill/>
+        </p:spPr>
+        <p:txBody>
+          <a:bodyPr wrap="square" lIns="0" rIns="0" tIns="0" bIns="0" anchor="t">
+            <a:spAutoFit/>
+          </a:bodyPr>
+          <a:lstStyle/>
+          <a:p>
+            <a:pPr algn="l">
+              <a:lnSpc>
+                <a:spcPct val="112000"/>
+              </a:lnSpc>
+              <a:spcAft>
+                <a:spcPts val="300"/>
+              </a:spcAft>
+            </a:pPr>
+            <a:r>
+              <a:rPr sz="2100" b="1">
+                <a:solidFill>
+                  <a:srgbClr val="2B2420"/>
+                </a:solidFill>
+                <a:latin typeface="Microsoft JhengHei"/>
+              </a:rPr>
+              <a:t>用參考書骨架直接開書</a:t>
+            </a:r>
+          </a:p>
+        </p:txBody>
+      </p:sp>
+      <p:sp>
+        <p:nvSpPr>
+          <p:cNvPr id="34" name="TextBox 33"/>
+          <p:cNvSpPr txBox="1"/>
+          <p:nvPr/>
+        </p:nvSpPr>
+        <p:spPr>
+          <a:xfrm>
+            <a:off x="6464808" y="2157984"/>
+            <a:ext cx="4846320" cy="329184"/>
+          </a:xfrm>
+          <a:prstGeom prst="rect">
+            <a:avLst/>
+          </a:prstGeom>
+          <a:noFill/>
+        </p:spPr>
+        <p:txBody>
+          <a:bodyPr wrap="square" lIns="0" rIns="0" tIns="0" bIns="0" anchor="t">
+            <a:spAutoFit/>
+          </a:bodyPr>
+          <a:lstStyle/>
+          <a:p>
+            <a:pPr algn="l">
+              <a:lnSpc>
+                <a:spcPct val="112000"/>
+              </a:lnSpc>
+              <a:spcAft>
+                <a:spcPts val="300"/>
+              </a:spcAft>
+            </a:pPr>
+            <a:r>
+              <a:rPr sz="1300" b="0">
+                <a:solidFill>
+                  <a:srgbClr val="8A3B2E"/>
+                </a:solidFill>
+                <a:latin typeface="Microsoft JhengHei"/>
+              </a:rPr>
+              <a:t>想快點看到雛形</a:t>
+            </a:r>
+          </a:p>
+        </p:txBody>
+      </p:sp>
+      <p:sp>
+        <p:nvSpPr>
+          <p:cNvPr id="35" name="TextBox 34"/>
+          <p:cNvSpPr txBox="1"/>
+          <p:nvPr/>
+        </p:nvSpPr>
+        <p:spPr>
+          <a:xfrm>
+            <a:off x="6464808" y="2615184"/>
+            <a:ext cx="4846320" cy="1097280"/>
+          </a:xfrm>
+          <a:prstGeom prst="rect">
+            <a:avLst/>
+          </a:prstGeom>
+          <a:noFill/>
+        </p:spPr>
+        <p:txBody>
+          <a:bodyPr wrap="square" lIns="0" rIns="0" tIns="0" bIns="0" anchor="t">
+            <a:spAutoFit/>
+          </a:bodyPr>
+          <a:lstStyle/>
+          <a:p>
+            <a:pPr algn="l">
+              <a:lnSpc>
+                <a:spcPct val="118000"/>
+              </a:lnSpc>
+              <a:spcAft>
+                <a:spcPts val="300"/>
+              </a:spcAft>
+            </a:pPr>
+            <a:r>
+              <a:rPr sz="1300" b="0">
+                <a:solidFill>
+                  <a:srgbClr val="5A514A"/>
+                </a:solidFill>
+                <a:latin typeface="Microsoft JhengHei"/>
+              </a:rPr>
+              <a:t>選一本參考書，模型產生骨架後直接寫入故事核心、世界觀、全書大綱、卷綱。</a:t>
+            </a:r>
+          </a:p>
+          <a:p>
+            <a:pPr algn="l">
+              <a:lnSpc>
+                <a:spcPct val="118000"/>
+              </a:lnSpc>
+              <a:spcAft>
+                <a:spcPts val="300"/>
+              </a:spcAft>
+            </a:pPr>
+            <a:r>
+              <a:rPr sz="1300" b="0">
+                <a:solidFill>
+                  <a:srgbClr val="5A514A"/>
+                </a:solidFill>
+                <a:latin typeface="Microsoft JhengHei"/>
+              </a:rPr>
+              <a:t>跳過訪談；沒提到的欄位標「待補」。</a:t>
+            </a:r>
+          </a:p>
+        </p:txBody>
+      </p:sp>
+      <p:sp>
+        <p:nvSpPr>
+          <p:cNvPr id="36" name="TextBox 35"/>
+          <p:cNvSpPr txBox="1"/>
+          <p:nvPr/>
+        </p:nvSpPr>
+        <p:spPr>
+          <a:xfrm>
+            <a:off x="6464808" y="3822191"/>
+            <a:ext cx="4846320" cy="640080"/>
+          </a:xfrm>
+          <a:prstGeom prst="rect">
+            <a:avLst/>
+          </a:prstGeom>
+          <a:noFill/>
+        </p:spPr>
+        <p:txBody>
+          <a:bodyPr wrap="square" lIns="0" rIns="0" tIns="0" bIns="0" anchor="t">
+            <a:spAutoFit/>
+          </a:bodyPr>
+          <a:lstStyle/>
+          <a:p>
+            <a:pPr algn="l">
+              <a:lnSpc>
+                <a:spcPct val="112000"/>
+              </a:lnSpc>
+              <a:spcAft>
+                <a:spcPts val="300"/>
+              </a:spcAft>
+            </a:pPr>
+            <a:r>
+              <a:rPr sz="1200" b="0">
+                <a:solidFill>
+                  <a:srgbClr val="6B6258"/>
+                </a:solidFill>
+                <a:latin typeface="Microsoft JhengHei"/>
+              </a:rPr>
+              <a:t>需要 API 執行者；參考書只取文風與結構，不帶名字與情節。</a:t>
+            </a:r>
+          </a:p>
+        </p:txBody>
+      </p:sp>
+      <p:sp>
+        <p:nvSpPr>
+          <p:cNvPr id="37" name="Rounded Rectangle 36"/>
+          <p:cNvSpPr/>
+          <p:nvPr/>
+        </p:nvSpPr>
+        <p:spPr>
+          <a:xfrm>
+            <a:off x="548640" y="4956048"/>
+            <a:ext cx="11091672" cy="1005840"/>
+          </a:xfrm>
+          <a:prstGeom prst="roundRect">
+            <a:avLst/>
+          </a:prstGeom>
+          <a:solidFill>
+            <a:srgbClr val="EADBD3"/>
+          </a:solidFill>
+          <a:ln>
+            <a:noFill/>
+          </a:ln>
+          <a:effectLst/>
+        </p:spPr>
+        <p:style>
+          <a:lnRef idx="1">
+            <a:schemeClr val="accent1"/>
+          </a:lnRef>
+          <a:fillRef idx="3">
+            <a:schemeClr val="accent1"/>
+          </a:fillRef>
+          <a:effectRef idx="2">
+            <a:schemeClr val="accent1"/>
+          </a:effectRef>
+          <a:fontRef idx="minor">
+            <a:schemeClr val="lt1"/>
+          </a:fontRef>
+        </p:style>
+        <p:txBody>
+          <a:bodyPr rtlCol="0" anchor="ctr"/>
+          <a:lstStyle/>
+          <a:p>
+            <a:pPr algn="ctr"/>
+          </a:p>
+        </p:txBody>
+      </p:sp>
+      <p:sp>
+        <p:nvSpPr>
+          <p:cNvPr id="38" name="TextBox 37"/>
+          <p:cNvSpPr txBox="1"/>
+          <p:nvPr/>
+        </p:nvSpPr>
+        <p:spPr>
+          <a:xfrm>
+            <a:off x="822960" y="5084064"/>
+            <a:ext cx="10607040" cy="365760"/>
+          </a:xfrm>
+          <a:prstGeom prst="rect">
+            <a:avLst/>
+          </a:prstGeom>
+          <a:noFill/>
+        </p:spPr>
+        <p:txBody>
+          <a:bodyPr wrap="square" lIns="0" rIns="0" tIns="0" bIns="0" anchor="t">
+            <a:spAutoFit/>
+          </a:bodyPr>
+          <a:lstStyle/>
+          <a:p>
+            <a:pPr algn="l">
+              <a:lnSpc>
+                <a:spcPct val="112000"/>
+              </a:lnSpc>
+              <a:spcAft>
+                <a:spcPts val="300"/>
+              </a:spcAft>
+            </a:pPr>
+            <a:r>
+              <a:rPr sz="1500" b="1">
+                <a:solidFill>
+                  <a:srgbClr val="2B2420"/>
+                </a:solidFill>
+                <a:latin typeface="Microsoft JhengHei"/>
+              </a:rPr>
+              <a:t>兩種方式都不會自動寫完一本書；下一步都是「卷先行 → 章綱 → 正文」。</a:t>
+            </a:r>
+          </a:p>
+        </p:txBody>
+      </p:sp>
+      <p:sp>
+        <p:nvSpPr>
+          <p:cNvPr id="39" name="TextBox 38"/>
+          <p:cNvSpPr txBox="1"/>
+          <p:nvPr/>
+        </p:nvSpPr>
+        <p:spPr>
+          <a:xfrm>
+            <a:off x="822960" y="5468112"/>
+            <a:ext cx="10607040" cy="320040"/>
+          </a:xfrm>
+          <a:prstGeom prst="rect">
+            <a:avLst/>
+          </a:prstGeom>
+          <a:noFill/>
+        </p:spPr>
+        <p:txBody>
+          <a:bodyPr wrap="square" lIns="0" rIns="0" tIns="0" bIns="0" anchor="t">
+            <a:spAutoFit/>
+          </a:bodyPr>
+          <a:lstStyle/>
+          <a:p>
+            <a:pPr algn="l">
+              <a:lnSpc>
+                <a:spcPct val="112000"/>
+              </a:lnSpc>
+              <a:spcAft>
+                <a:spcPts val="300"/>
+              </a:spcAft>
+            </a:pPr>
+            <a:r>
+              <a:rPr sz="1200" b="0">
+                <a:solidFill>
+                  <a:srgbClr val="6B6258"/>
+                </a:solidFill>
+                <a:latin typeface="Microsoft JhengHei"/>
+              </a:rPr>
+              <a:t>參考書骨架是提案，不是完稿；看過再決定要不要用。既有書仍只產生草稿，不會自動套用。</a:t>
+            </a:r>
           </a:p>
         </p:txBody>
       </p:sp>
@@ -5449,7 +5647,7 @@
                   <a:srgbClr val="5A514A"/>
                 </a:solidFill>
               </a:rPr>
-              <a:t>逐處列出要改的句子和原因，你逐段確認</a:t>
+              <a:t>逐處列出要改的句子和原因；整章自動會再跑一次文風檢查</a:t>
             </a:r>
             <a:endParaRPr lang="en-US" sz="1300" dirty="0"/>
           </a:p>
@@ -5623,7 +5821,7 @@
                   <a:schemeClr val="tx1"/>
                 </a:solidFill>
               </a:rPr>
-              <a:t>按「寫章節（候選稿）」→ 審閱候選稿 → 滿意就採用。採用之前，正文和追蹤資料都不會被動到。</a:t>
+              <a:t>按「寫章節（候選稿）」→ 審閱 → 採用。採用前，正文與追蹤資料都不會被動到；整章自動另含文風檢查。</a:t>
             </a:r>
             <a:endParaRPr lang="en-US" sz="1500" dirty="0"/>
           </a:p>
@@ -5731,7 +5929,7 @@
                   <a:schemeClr val="tx1"/>
                 </a:solidFill>
               </a:rPr>
-              <a:t>審查與逐段修訂</a:t>
+              <a:t>審查、文風與逐段修訂</a:t>
             </a:r>
             <a:endParaRPr lang="en-US" sz="3000" dirty="0"/>
           </a:p>
@@ -6413,7 +6611,7 @@
                   <a:srgbClr val="3F3833"/>
                 </a:solidFill>
               </a:rPr>
-              <a:t>去 AI 味的保真檢查：名字、數字、對白有沒有被改掉，字數變化大不大</a:t>
+              <a:t>去 AI 味的保真檢查＋文風 13 指標：名字、數字、對白有沒有被改掉</a:t>
             </a:r>
             <a:endParaRPr lang="en-US" sz="1500" dirty="0"/>
           </a:p>
@@ -6512,693 +6710,12 @@
           <a:bodyPr wrap="square" lIns="0" tIns="0" rIns="0" bIns="0" rtlCol="0" anchor="ctr"/>
           <a:lstStyle/>
           <a:p>
-            <a:pPr algn="l" indent="0" marL="0">
-              <a:buNone/>
-            </a:pPr>
-            <a:r>
-              <a:rPr lang="en-US" sz="3000" b="1" dirty="0">
-                <a:solidFill>
-                  <a:schemeClr val="tx1"/>
-                </a:solidFill>
-              </a:rPr>
+            <a:r>
               <a:t>熟了以後：整章自動流程</a:t>
             </a:r>
-            <a:endParaRPr lang="en-US" sz="3000" dirty="0"/>
-          </a:p>
-        </p:txBody>
-      </p:sp>
-      <p:sp>
-        <p:nvSpPr>
-          <p:cNvPr id="3" name="step-203"/>
-          <p:cNvSpPr/>
-          <p:nvPr/>
-        </p:nvSpPr>
-        <p:spPr>
-          <a:xfrm>
-            <a:off x="548640" y="1325880"/>
-            <a:ext cx="1645920" cy="502920"/>
-          </a:xfrm>
-          <a:prstGeom prst="roundRect">
-            <a:avLst>
-              <a:gd name="adj" fmla="val 18182"/>
-            </a:avLst>
-          </a:prstGeom>
-          <a:solidFill>
-            <a:srgbClr val="EADBD3"/>
-          </a:solidFill>
-          <a:ln/>
-        </p:spPr>
-      </p:sp>
-      <p:sp>
-        <p:nvSpPr>
-          <p:cNvPr id="4" name="text-204"/>
-          <p:cNvSpPr txBox="1"/>
-          <p:nvPr/>
-        </p:nvSpPr>
-        <p:spPr>
-          <a:xfrm>
-            <a:off x="548640" y="1325880"/>
-            <a:ext cx="1645920" cy="502920"/>
-          </a:xfrm>
-          <a:prstGeom prst="rect">
-            <a:avLst/>
-          </a:prstGeom>
-          <a:noFill/>
-          <a:ln/>
-        </p:spPr>
-        <p:txBody>
-          <a:bodyPr wrap="square" lIns="0" tIns="0" rIns="0" bIns="0" rtlCol="0" anchor="ctr"/>
-          <a:lstStyle/>
-          <a:p>
-            <a:pPr algn="ctr" indent="0" marL="0">
-              <a:buNone/>
-            </a:pPr>
-            <a:r>
-              <a:rPr lang="en-US" sz="1300" b="1" dirty="0">
-                <a:solidFill>
-                  <a:schemeClr val="tx1"/>
-                </a:solidFill>
-              </a:rPr>
-              <a:t>1. 章綱</a:t>
-            </a:r>
-            <a:endParaRPr lang="en-US" sz="1300" dirty="0"/>
-          </a:p>
-        </p:txBody>
-      </p:sp>
-      <p:sp>
-        <p:nvSpPr>
-          <p:cNvPr id="5" name="step-205"/>
-          <p:cNvSpPr/>
-          <p:nvPr/>
-        </p:nvSpPr>
-        <p:spPr>
-          <a:xfrm>
-            <a:off x="2423160" y="1325880"/>
-            <a:ext cx="1645920" cy="502920"/>
-          </a:xfrm>
-          <a:prstGeom prst="roundRect">
-            <a:avLst>
-              <a:gd name="adj" fmla="val 18182"/>
-            </a:avLst>
-          </a:prstGeom>
-          <a:solidFill>
-            <a:srgbClr val="EADBD3"/>
-          </a:solidFill>
-          <a:ln/>
-        </p:spPr>
-      </p:sp>
-      <p:sp>
-        <p:nvSpPr>
-          <p:cNvPr id="6" name="text-206"/>
-          <p:cNvSpPr txBox="1"/>
-          <p:nvPr/>
-        </p:nvSpPr>
-        <p:spPr>
-          <a:xfrm>
-            <a:off x="2423160" y="1325880"/>
-            <a:ext cx="1645920" cy="502920"/>
-          </a:xfrm>
-          <a:prstGeom prst="rect">
-            <a:avLst/>
-          </a:prstGeom>
-          <a:noFill/>
-          <a:ln/>
-        </p:spPr>
-        <p:txBody>
-          <a:bodyPr wrap="square" lIns="0" tIns="0" rIns="0" bIns="0" rtlCol="0" anchor="ctr"/>
-          <a:lstStyle/>
-          <a:p>
-            <a:pPr algn="ctr" indent="0" marL="0">
-              <a:buNone/>
-            </a:pPr>
-            <a:r>
-              <a:rPr lang="en-US" sz="1300" b="1" dirty="0">
-                <a:solidFill>
-                  <a:schemeClr val="tx1"/>
-                </a:solidFill>
-              </a:rPr>
-              <a:t>2. 寫章節</a:t>
-            </a:r>
-            <a:endParaRPr lang="en-US" sz="1300" dirty="0"/>
-          </a:p>
-        </p:txBody>
-      </p:sp>
-      <p:sp>
-        <p:nvSpPr>
-          <p:cNvPr id="7" name="step-207"/>
-          <p:cNvSpPr/>
-          <p:nvPr/>
-        </p:nvSpPr>
-        <p:spPr>
-          <a:xfrm>
-            <a:off x="4297680" y="1325880"/>
-            <a:ext cx="1645920" cy="502920"/>
-          </a:xfrm>
-          <a:prstGeom prst="roundRect">
-            <a:avLst>
-              <a:gd name="adj" fmla="val 18182"/>
-            </a:avLst>
-          </a:prstGeom>
-          <a:solidFill>
-            <a:srgbClr val="EADBD3"/>
-          </a:solidFill>
-          <a:ln/>
-        </p:spPr>
-      </p:sp>
-      <p:sp>
-        <p:nvSpPr>
-          <p:cNvPr id="8" name="text-208"/>
-          <p:cNvSpPr txBox="1"/>
-          <p:nvPr/>
-        </p:nvSpPr>
-        <p:spPr>
-          <a:xfrm>
-            <a:off x="4297680" y="1325880"/>
-            <a:ext cx="1645920" cy="502920"/>
-          </a:xfrm>
-          <a:prstGeom prst="rect">
-            <a:avLst/>
-          </a:prstGeom>
-          <a:noFill/>
-          <a:ln/>
-        </p:spPr>
-        <p:txBody>
-          <a:bodyPr wrap="square" lIns="0" tIns="0" rIns="0" bIns="0" rtlCol="0" anchor="ctr"/>
-          <a:lstStyle/>
-          <a:p>
-            <a:pPr algn="ctr" indent="0" marL="0">
-              <a:buNone/>
-            </a:pPr>
-            <a:r>
-              <a:rPr lang="en-US" sz="1300" b="1" dirty="0">
-                <a:solidFill>
-                  <a:schemeClr val="tx1"/>
-                </a:solidFill>
-              </a:rPr>
-              <a:t>3. 章綱核對</a:t>
-            </a:r>
-            <a:endParaRPr lang="en-US" sz="1300" dirty="0"/>
-          </a:p>
-        </p:txBody>
-      </p:sp>
-      <p:sp>
-        <p:nvSpPr>
-          <p:cNvPr id="9" name="step-209"/>
-          <p:cNvSpPr/>
-          <p:nvPr/>
-        </p:nvSpPr>
-        <p:spPr>
-          <a:xfrm>
-            <a:off x="548640" y="2011680"/>
-            <a:ext cx="1645920" cy="502920"/>
-          </a:xfrm>
-          <a:prstGeom prst="roundRect">
-            <a:avLst>
-              <a:gd name="adj" fmla="val 18182"/>
-            </a:avLst>
-          </a:prstGeom>
-          <a:solidFill>
-            <a:srgbClr val="EADBD3"/>
-          </a:solidFill>
-          <a:ln/>
-        </p:spPr>
-      </p:sp>
-      <p:sp>
-        <p:nvSpPr>
-          <p:cNvPr id="10" name="text-210"/>
-          <p:cNvSpPr txBox="1"/>
-          <p:nvPr/>
-        </p:nvSpPr>
-        <p:spPr>
-          <a:xfrm>
-            <a:off x="548640" y="2011680"/>
-            <a:ext cx="1645920" cy="502920"/>
-          </a:xfrm>
-          <a:prstGeom prst="rect">
-            <a:avLst/>
-          </a:prstGeom>
-          <a:noFill/>
-          <a:ln/>
-        </p:spPr>
-        <p:txBody>
-          <a:bodyPr wrap="square" lIns="0" tIns="0" rIns="0" bIns="0" rtlCol="0" anchor="ctr"/>
-          <a:lstStyle/>
-          <a:p>
-            <a:pPr algn="ctr" indent="0" marL="0">
-              <a:buNone/>
-            </a:pPr>
-            <a:r>
-              <a:rPr lang="en-US" sz="1300" b="1" dirty="0">
-                <a:solidFill>
-                  <a:schemeClr val="tx1"/>
-                </a:solidFill>
-              </a:rPr>
-              <a:t>4. 去 AI 味</a:t>
-            </a:r>
-            <a:endParaRPr lang="en-US" sz="1300" dirty="0"/>
-          </a:p>
-        </p:txBody>
-      </p:sp>
-      <p:sp>
-        <p:nvSpPr>
-          <p:cNvPr id="11" name="step-211"/>
-          <p:cNvSpPr/>
-          <p:nvPr/>
-        </p:nvSpPr>
-        <p:spPr>
-          <a:xfrm>
-            <a:off x="2423160" y="2011680"/>
-            <a:ext cx="1645920" cy="502920"/>
-          </a:xfrm>
-          <a:prstGeom prst="roundRect">
-            <a:avLst>
-              <a:gd name="adj" fmla="val 18182"/>
-            </a:avLst>
-          </a:prstGeom>
-          <a:solidFill>
-            <a:srgbClr val="EADBD3"/>
-          </a:solidFill>
-          <a:ln/>
-        </p:spPr>
-      </p:sp>
-      <p:sp>
-        <p:nvSpPr>
-          <p:cNvPr id="12" name="text-212"/>
-          <p:cNvSpPr txBox="1"/>
-          <p:nvPr/>
-        </p:nvSpPr>
-        <p:spPr>
-          <a:xfrm>
-            <a:off x="2423160" y="2011680"/>
-            <a:ext cx="1645920" cy="502920"/>
-          </a:xfrm>
-          <a:prstGeom prst="rect">
-            <a:avLst/>
-          </a:prstGeom>
-          <a:noFill/>
-          <a:ln/>
-        </p:spPr>
-        <p:txBody>
-          <a:bodyPr wrap="square" lIns="0" tIns="0" rIns="0" bIns="0" rtlCol="0" anchor="ctr"/>
-          <a:lstStyle/>
-          <a:p>
-            <a:pPr algn="ctr" indent="0" marL="0">
-              <a:buNone/>
-            </a:pPr>
-            <a:r>
-              <a:rPr lang="en-US" sz="1300" b="1" dirty="0">
-                <a:solidFill>
-                  <a:schemeClr val="tx1"/>
-                </a:solidFill>
-              </a:rPr>
-              <a:t>5. 審查</a:t>
-            </a:r>
-            <a:endParaRPr lang="en-US" sz="1300" dirty="0"/>
-          </a:p>
-        </p:txBody>
-      </p:sp>
-      <p:sp>
-        <p:nvSpPr>
-          <p:cNvPr id="13" name="step-213"/>
-          <p:cNvSpPr/>
-          <p:nvPr/>
-        </p:nvSpPr>
-        <p:spPr>
-          <a:xfrm>
-            <a:off x="4297680" y="2011680"/>
-            <a:ext cx="1645920" cy="502920"/>
-          </a:xfrm>
-          <a:prstGeom prst="roundRect">
-            <a:avLst>
-              <a:gd name="adj" fmla="val 18182"/>
-            </a:avLst>
-          </a:prstGeom>
-          <a:solidFill>
-            <a:srgbClr val="EADBD3"/>
-          </a:solidFill>
-          <a:ln/>
-        </p:spPr>
-      </p:sp>
-      <p:sp>
-        <p:nvSpPr>
-          <p:cNvPr id="14" name="text-214"/>
-          <p:cNvSpPr txBox="1"/>
-          <p:nvPr/>
-        </p:nvSpPr>
-        <p:spPr>
-          <a:xfrm>
-            <a:off x="4297680" y="2011680"/>
-            <a:ext cx="1645920" cy="502920"/>
-          </a:xfrm>
-          <a:prstGeom prst="rect">
-            <a:avLst/>
-          </a:prstGeom>
-          <a:noFill/>
-          <a:ln/>
-        </p:spPr>
-        <p:txBody>
-          <a:bodyPr wrap="square" lIns="0" tIns="0" rIns="0" bIns="0" rtlCol="0" anchor="ctr"/>
-          <a:lstStyle/>
-          <a:p>
-            <a:pPr algn="ctr" indent="0" marL="0">
-              <a:buNone/>
-            </a:pPr>
-            <a:r>
-              <a:rPr lang="en-US" sz="1300" b="1" dirty="0">
-                <a:solidFill>
-                  <a:schemeClr val="tx1"/>
-                </a:solidFill>
-              </a:rPr>
-              <a:t>6. 自動勾選</a:t>
-            </a:r>
-            <a:endParaRPr lang="en-US" sz="1300" dirty="0"/>
-          </a:p>
-        </p:txBody>
-      </p:sp>
-      <p:sp>
-        <p:nvSpPr>
-          <p:cNvPr id="15" name="step-215"/>
-          <p:cNvSpPr/>
-          <p:nvPr/>
-        </p:nvSpPr>
-        <p:spPr>
-          <a:xfrm>
-            <a:off x="548640" y="2697480"/>
-            <a:ext cx="1645920" cy="502920"/>
-          </a:xfrm>
-          <a:prstGeom prst="roundRect">
-            <a:avLst>
-              <a:gd name="adj" fmla="val 18182"/>
-            </a:avLst>
-          </a:prstGeom>
-          <a:solidFill>
-            <a:srgbClr val="EADBD3"/>
-          </a:solidFill>
-          <a:ln/>
-        </p:spPr>
-      </p:sp>
-      <p:sp>
-        <p:nvSpPr>
-          <p:cNvPr id="16" name="text-216"/>
-          <p:cNvSpPr txBox="1"/>
-          <p:nvPr/>
-        </p:nvSpPr>
-        <p:spPr>
-          <a:xfrm>
-            <a:off x="548640" y="2697480"/>
-            <a:ext cx="1645920" cy="502920"/>
-          </a:xfrm>
-          <a:prstGeom prst="rect">
-            <a:avLst/>
-          </a:prstGeom>
-          <a:noFill/>
-          <a:ln/>
-        </p:spPr>
-        <p:txBody>
-          <a:bodyPr wrap="square" lIns="0" tIns="0" rIns="0" bIns="0" rtlCol="0" anchor="ctr"/>
-          <a:lstStyle/>
-          <a:p>
-            <a:pPr algn="ctr" indent="0" marL="0">
-              <a:buNone/>
-            </a:pPr>
-            <a:r>
-              <a:rPr lang="en-US" sz="1300" b="1" dirty="0">
-                <a:solidFill>
-                  <a:schemeClr val="tx1"/>
-                </a:solidFill>
-              </a:rPr>
-              <a:t>7. 修訂</a:t>
-            </a:r>
-            <a:endParaRPr lang="en-US" sz="1300" dirty="0"/>
-          </a:p>
-        </p:txBody>
-      </p:sp>
-      <p:sp>
-        <p:nvSpPr>
-          <p:cNvPr id="17" name="step-217"/>
-          <p:cNvSpPr/>
-          <p:nvPr/>
-        </p:nvSpPr>
-        <p:spPr>
-          <a:xfrm>
-            <a:off x="2423160" y="2697480"/>
-            <a:ext cx="1645920" cy="502920"/>
-          </a:xfrm>
-          <a:prstGeom prst="roundRect">
-            <a:avLst>
-              <a:gd name="adj" fmla="val 18182"/>
-            </a:avLst>
-          </a:prstGeom>
-          <a:solidFill>
-            <a:srgbClr val="EADBD3"/>
-          </a:solidFill>
-          <a:ln/>
-        </p:spPr>
-      </p:sp>
-      <p:sp>
-        <p:nvSpPr>
-          <p:cNvPr id="18" name="text-218"/>
-          <p:cNvSpPr txBox="1"/>
-          <p:nvPr/>
-        </p:nvSpPr>
-        <p:spPr>
-          <a:xfrm>
-            <a:off x="2423160" y="2697480"/>
-            <a:ext cx="1645920" cy="502920"/>
-          </a:xfrm>
-          <a:prstGeom prst="rect">
-            <a:avLst/>
-          </a:prstGeom>
-          <a:noFill/>
-          <a:ln/>
-        </p:spPr>
-        <p:txBody>
-          <a:bodyPr wrap="square" lIns="0" tIns="0" rIns="0" bIns="0" rtlCol="0" anchor="ctr"/>
-          <a:lstStyle/>
-          <a:p>
-            <a:pPr algn="ctr" indent="0" marL="0">
-              <a:buNone/>
-            </a:pPr>
-            <a:r>
-              <a:rPr lang="en-US" sz="1300" b="1" dirty="0">
-                <a:solidFill>
-                  <a:schemeClr val="tx1"/>
-                </a:solidFill>
-              </a:rPr>
-              <a:t>8. 套用</a:t>
-            </a:r>
-            <a:endParaRPr lang="en-US" sz="1300" dirty="0"/>
-          </a:p>
-        </p:txBody>
-      </p:sp>
-      <p:sp>
-        <p:nvSpPr>
-          <p:cNvPr id="19" name="step-219"/>
-          <p:cNvSpPr/>
-          <p:nvPr/>
-        </p:nvSpPr>
-        <p:spPr>
-          <a:xfrm>
-            <a:off x="4297680" y="2697480"/>
-            <a:ext cx="1645920" cy="502920"/>
-          </a:xfrm>
-          <a:prstGeom prst="roundRect">
-            <a:avLst>
-              <a:gd name="adj" fmla="val 18182"/>
-            </a:avLst>
-          </a:prstGeom>
-          <a:solidFill>
-            <a:schemeClr val="accent3"/>
-          </a:solidFill>
-          <a:ln/>
-        </p:spPr>
-      </p:sp>
-      <p:sp>
-        <p:nvSpPr>
-          <p:cNvPr id="20" name="text-220"/>
-          <p:cNvSpPr txBox="1"/>
-          <p:nvPr/>
-        </p:nvSpPr>
-        <p:spPr>
-          <a:xfrm>
-            <a:off x="4297680" y="2697480"/>
-            <a:ext cx="1645920" cy="502920"/>
-          </a:xfrm>
-          <a:prstGeom prst="rect">
-            <a:avLst/>
-          </a:prstGeom>
-          <a:noFill/>
-          <a:ln/>
-        </p:spPr>
-        <p:txBody>
-          <a:bodyPr wrap="square" lIns="0" tIns="0" rIns="0" bIns="0" rtlCol="0" anchor="ctr"/>
-          <a:lstStyle/>
-          <a:p>
-            <a:pPr algn="ctr" indent="0" marL="0">
-              <a:buNone/>
-            </a:pPr>
-            <a:r>
-              <a:rPr lang="en-US" sz="1300" b="1" dirty="0">
-                <a:solidFill>
-                  <a:schemeClr val="bg1"/>
-                </a:solidFill>
-              </a:rPr>
-              <a:t>9. 定稿回寫</a:t>
-            </a:r>
-            <a:endParaRPr lang="en-US" sz="1300" dirty="0"/>
-          </a:p>
-        </p:txBody>
-      </p:sp>
-      <p:sp>
-        <p:nvSpPr>
-          <p:cNvPr id="21" name="text-221"/>
-          <p:cNvSpPr txBox="1"/>
-          <p:nvPr/>
-        </p:nvSpPr>
-        <p:spPr>
-          <a:xfrm>
-            <a:off x="548640" y="3611880"/>
-            <a:ext cx="5669280" cy="2743200"/>
-          </a:xfrm>
-          <a:prstGeom prst="rect">
-            <a:avLst/>
-          </a:prstGeom>
-          <a:noFill/>
-          <a:ln/>
-        </p:spPr>
-        <p:txBody>
-          <a:bodyPr wrap="square" lIns="0" tIns="0" rIns="0" bIns="0" rtlCol="0" anchor="t"/>
-          <a:lstStyle/>
-          <a:p>
-            <a:pPr marL="203200" indent="-203200">
-              <a:spcAft>
-                <a:spcPts val="600"/>
-              </a:spcAft>
-              <a:buSzPct val="100000"/>
-              <a:buChar char="•"/>
-            </a:pPr>
-            <a:r>
-              <a:rPr lang="en-US" sz="1400" dirty="0">
-                <a:solidFill>
-                  <a:srgbClr val="3F3833"/>
-                </a:solidFill>
-              </a:rPr>
-              <a:t>總覽或章節頁按「⚡ 整章自動」，選章節範圍</a:t>
-            </a:r>
-            <a:endParaRPr lang="en-US" sz="1500" dirty="0"/>
-          </a:p>
-          <a:p>
-            <a:pPr marL="203200" indent="-203200">
-              <a:spcAft>
-                <a:spcPts val="600"/>
-              </a:spcAft>
-              <a:buSzPct val="100000"/>
-              <a:buChar char="•"/>
-            </a:pPr>
-            <a:r>
-              <a:rPr lang="en-US" sz="1400" dirty="0">
-                <a:solidFill>
-                  <a:srgbClr val="3F3833"/>
-                </a:solidFill>
-              </a:rPr>
-              <a:t>預設「寫一章停一章」：每章定稿後停下來給你看</a:t>
-            </a:r>
-            <a:endParaRPr lang="en-US" sz="1500" dirty="0"/>
-          </a:p>
-          <a:p>
-            <a:pPr marL="203200" indent="-203200">
-              <a:spcAft>
-                <a:spcPts val="600"/>
-              </a:spcAft>
-              <a:buSzPct val="100000"/>
-              <a:buChar char="•"/>
-            </a:pPr>
-            <a:r>
-              <a:rPr lang="en-US" sz="1400" dirty="0">
-                <a:solidFill>
-                  <a:srgbClr val="3F3833"/>
-                </a:solidFill>
-              </a:rPr>
-              <a:t>每一步各呼叫一次 AI；失敗就停在那一步，修好可以從那一步繼續</a:t>
-            </a:r>
-            <a:endParaRPr lang="en-US" sz="1500" dirty="0"/>
-          </a:p>
-          <a:p>
-            <a:pPr marL="203200" indent="-203200">
-              <a:spcAft>
-                <a:spcPts val="600"/>
-              </a:spcAft>
-              <a:buSzPct val="100000"/>
-              <a:buChar char="•"/>
-            </a:pPr>
-            <a:r>
-              <a:rPr lang="en-US" sz="1400" dirty="0">
-                <a:solidFill>
-                  <a:srgbClr val="3F3833"/>
-                </a:solidFill>
-              </a:rPr>
-              <a:t>設定裡可以替每一步指定不同的執行者或模型</a:t>
-            </a:r>
-            <a:endParaRPr lang="en-US" sz="1500" dirty="0"/>
-          </a:p>
-        </p:txBody>
-      </p:sp>
-      <p:sp>
-        <p:nvSpPr>
-          <p:cNvPr id="22" name="shot-frame-222"/>
-          <p:cNvSpPr/>
-          <p:nvPr/>
-        </p:nvSpPr>
-        <p:spPr>
-          <a:xfrm>
-            <a:off x="6766560" y="1234440"/>
-            <a:ext cx="4767492" cy="5120640"/>
-          </a:xfrm>
-          <a:prstGeom prst="rect">
-            <a:avLst/>
-          </a:prstGeom>
-          <a:solidFill>
-            <a:schemeClr val="bg1"/>
-          </a:solidFill>
-          <a:ln w="9525">
-            <a:solidFill>
-              <a:srgbClr val="D9D1C7"/>
-            </a:solidFill>
-            <a:prstDash val="solid"/>
-          </a:ln>
-          <a:effectLst>
-            <a:outerShdw sx="100000" sy="100000" kx="0" ky="0" algn="bl" rotWithShape="0" blurRad="101600" dist="38100" dir="5400000">
-              <a:srgbClr val="000000">
-                <a:alpha val="18000"/>
-              </a:srgbClr>
-            </a:outerShdw>
-          </a:effectLst>
-        </p:spPr>
-      </p:sp>
-      <p:pic>
-        <p:nvPicPr>
-          <p:cNvPr id="23" name="shot-223" descr="整章自動流程設定視窗">    </p:cNvPr>
-          <p:cNvPicPr>
-            <a:picLocks noChangeAspect="1"/>
-          </p:cNvPicPr>
-          <p:nvPr/>
-        </p:nvPicPr>
-        <p:blipFill>
-          <a:blip r:embed="rId1"/>
-          <a:stretch>
-            <a:fillRect/>
-          </a:stretch>
-        </p:blipFill>
-        <p:spPr>
-          <a:xfrm>
-            <a:off x="6766560" y="1234440"/>
-            <a:ext cx="4767492" cy="5120640"/>
-          </a:xfrm>
-          <a:prstGeom prst="rect">
-            <a:avLst/>
-          </a:prstGeom>
-        </p:spPr>
-      </p:pic>
+          </a:p>
+        </p:txBody>
+      </p:sp>
       <p:sp>
         <p:nvSpPr>
           <p:cNvPr id="25" name="Slide Number Placeholder 0"/>
@@ -7241,6 +6758,935 @@
               <a:t>15</a:t>
             </a:fld>
             <a:endParaRPr lang="en-US"/>
+          </a:p>
+        </p:txBody>
+      </p:sp>
+      <p:sp>
+        <p:nvSpPr>
+          <p:cNvPr id="26" name="TextBox 25"/>
+          <p:cNvSpPr txBox="1"/>
+          <p:nvPr/>
+        </p:nvSpPr>
+        <p:spPr>
+          <a:xfrm>
+            <a:off x="548640" y="1005840"/>
+            <a:ext cx="11064240" cy="310896"/>
+          </a:xfrm>
+          <a:prstGeom prst="rect">
+            <a:avLst/>
+          </a:prstGeom>
+          <a:noFill/>
+        </p:spPr>
+        <p:txBody>
+          <a:bodyPr wrap="square" lIns="0" rIns="0" tIns="0" bIns="0" anchor="t">
+            <a:spAutoFit/>
+          </a:bodyPr>
+          <a:lstStyle/>
+          <a:p>
+            <a:pPr algn="l">
+              <a:lnSpc>
+                <a:spcPct val="112000"/>
+              </a:lnSpc>
+              <a:spcAft>
+                <a:spcPts val="300"/>
+              </a:spcAft>
+            </a:pPr>
+            <a:r>
+              <a:rPr sz="1300" b="0">
+                <a:solidFill>
+                  <a:srgbClr val="6B6258"/>
+                </a:solidFill>
+                <a:latin typeface="Microsoft JhengHei"/>
+              </a:rPr>
+              <a:t>十章一輪也可以；流程會一章一章跑，失敗停在那一步</a:t>
+            </a:r>
+          </a:p>
+        </p:txBody>
+      </p:sp>
+      <p:sp>
+        <p:nvSpPr>
+          <p:cNvPr id="27" name="Rounded Rectangle 26"/>
+          <p:cNvSpPr/>
+          <p:nvPr/>
+        </p:nvSpPr>
+        <p:spPr>
+          <a:xfrm>
+            <a:off x="548640" y="1481328"/>
+            <a:ext cx="2103120" cy="566928"/>
+          </a:xfrm>
+          <a:prstGeom prst="roundRect">
+            <a:avLst/>
+          </a:prstGeom>
+          <a:solidFill>
+            <a:srgbClr val="EADBD3"/>
+          </a:solidFill>
+          <a:ln>
+            <a:noFill/>
+          </a:ln>
+          <a:effectLst/>
+        </p:spPr>
+        <p:style>
+          <a:lnRef idx="1">
+            <a:schemeClr val="accent1"/>
+          </a:lnRef>
+          <a:fillRef idx="3">
+            <a:schemeClr val="accent1"/>
+          </a:fillRef>
+          <a:effectRef idx="2">
+            <a:schemeClr val="accent1"/>
+          </a:effectRef>
+          <a:fontRef idx="minor">
+            <a:schemeClr val="lt1"/>
+          </a:fontRef>
+        </p:style>
+        <p:txBody>
+          <a:bodyPr rtlCol="0" anchor="ctr" lIns="0" rIns="0" tIns="0" bIns="0"/>
+          <a:lstStyle/>
+          <a:p>
+            <a:pPr algn="ctr"/>
+            <a:r>
+              <a:rPr sz="1300" b="1">
+                <a:solidFill>
+                  <a:srgbClr val="2B2420"/>
+                </a:solidFill>
+                <a:latin typeface="Microsoft JhengHei"/>
+              </a:rPr>
+              <a:t>1. 章綱</a:t>
+            </a:r>
+          </a:p>
+        </p:txBody>
+      </p:sp>
+      <p:sp>
+        <p:nvSpPr>
+          <p:cNvPr id="28" name="Rounded Rectangle 27"/>
+          <p:cNvSpPr/>
+          <p:nvPr/>
+        </p:nvSpPr>
+        <p:spPr>
+          <a:xfrm>
+            <a:off x="2788920" y="1481328"/>
+            <a:ext cx="2103120" cy="566928"/>
+          </a:xfrm>
+          <a:prstGeom prst="roundRect">
+            <a:avLst/>
+          </a:prstGeom>
+          <a:solidFill>
+            <a:srgbClr val="EADBD3"/>
+          </a:solidFill>
+          <a:ln>
+            <a:noFill/>
+          </a:ln>
+          <a:effectLst/>
+        </p:spPr>
+        <p:style>
+          <a:lnRef idx="1">
+            <a:schemeClr val="accent1"/>
+          </a:lnRef>
+          <a:fillRef idx="3">
+            <a:schemeClr val="accent1"/>
+          </a:fillRef>
+          <a:effectRef idx="2">
+            <a:schemeClr val="accent1"/>
+          </a:effectRef>
+          <a:fontRef idx="minor">
+            <a:schemeClr val="lt1"/>
+          </a:fontRef>
+        </p:style>
+        <p:txBody>
+          <a:bodyPr rtlCol="0" anchor="ctr" lIns="0" rIns="0" tIns="0" bIns="0"/>
+          <a:lstStyle/>
+          <a:p>
+            <a:pPr algn="ctr"/>
+            <a:r>
+              <a:rPr sz="1300" b="1">
+                <a:solidFill>
+                  <a:srgbClr val="2B2420"/>
+                </a:solidFill>
+                <a:latin typeface="Microsoft JhengHei"/>
+              </a:rPr>
+              <a:t>2. 寫章節</a:t>
+            </a:r>
+          </a:p>
+        </p:txBody>
+      </p:sp>
+      <p:sp>
+        <p:nvSpPr>
+          <p:cNvPr id="29" name="Rounded Rectangle 28"/>
+          <p:cNvSpPr/>
+          <p:nvPr/>
+        </p:nvSpPr>
+        <p:spPr>
+          <a:xfrm>
+            <a:off x="5029199" y="1481328"/>
+            <a:ext cx="2103120" cy="566928"/>
+          </a:xfrm>
+          <a:prstGeom prst="roundRect">
+            <a:avLst/>
+          </a:prstGeom>
+          <a:solidFill>
+            <a:srgbClr val="EADBD3"/>
+          </a:solidFill>
+          <a:ln>
+            <a:noFill/>
+          </a:ln>
+          <a:effectLst/>
+        </p:spPr>
+        <p:style>
+          <a:lnRef idx="1">
+            <a:schemeClr val="accent1"/>
+          </a:lnRef>
+          <a:fillRef idx="3">
+            <a:schemeClr val="accent1"/>
+          </a:fillRef>
+          <a:effectRef idx="2">
+            <a:schemeClr val="accent1"/>
+          </a:effectRef>
+          <a:fontRef idx="minor">
+            <a:schemeClr val="lt1"/>
+          </a:fontRef>
+        </p:style>
+        <p:txBody>
+          <a:bodyPr rtlCol="0" anchor="ctr" lIns="0" rIns="0" tIns="0" bIns="0"/>
+          <a:lstStyle/>
+          <a:p>
+            <a:pPr algn="ctr"/>
+            <a:r>
+              <a:rPr sz="1300" b="1">
+                <a:solidFill>
+                  <a:srgbClr val="2B2420"/>
+                </a:solidFill>
+                <a:latin typeface="Microsoft JhengHei"/>
+              </a:rPr>
+              <a:t>3. 章綱核對</a:t>
+            </a:r>
+          </a:p>
+        </p:txBody>
+      </p:sp>
+      <p:sp>
+        <p:nvSpPr>
+          <p:cNvPr id="30" name="Rounded Rectangle 29"/>
+          <p:cNvSpPr/>
+          <p:nvPr/>
+        </p:nvSpPr>
+        <p:spPr>
+          <a:xfrm>
+            <a:off x="7269479" y="1481328"/>
+            <a:ext cx="2103120" cy="566928"/>
+          </a:xfrm>
+          <a:prstGeom prst="roundRect">
+            <a:avLst/>
+          </a:prstGeom>
+          <a:solidFill>
+            <a:srgbClr val="EADBD3"/>
+          </a:solidFill>
+          <a:ln>
+            <a:noFill/>
+          </a:ln>
+          <a:effectLst/>
+        </p:spPr>
+        <p:style>
+          <a:lnRef idx="1">
+            <a:schemeClr val="accent1"/>
+          </a:lnRef>
+          <a:fillRef idx="3">
+            <a:schemeClr val="accent1"/>
+          </a:fillRef>
+          <a:effectRef idx="2">
+            <a:schemeClr val="accent1"/>
+          </a:effectRef>
+          <a:fontRef idx="minor">
+            <a:schemeClr val="lt1"/>
+          </a:fontRef>
+        </p:style>
+        <p:txBody>
+          <a:bodyPr rtlCol="0" anchor="ctr" lIns="0" rIns="0" tIns="0" bIns="0"/>
+          <a:lstStyle/>
+          <a:p>
+            <a:pPr algn="ctr"/>
+            <a:r>
+              <a:rPr sz="1300" b="1">
+                <a:solidFill>
+                  <a:srgbClr val="2B2420"/>
+                </a:solidFill>
+                <a:latin typeface="Microsoft JhengHei"/>
+              </a:rPr>
+              <a:t>4. 去 AI 味</a:t>
+            </a:r>
+          </a:p>
+        </p:txBody>
+      </p:sp>
+      <p:sp>
+        <p:nvSpPr>
+          <p:cNvPr id="31" name="Rounded Rectangle 30"/>
+          <p:cNvSpPr/>
+          <p:nvPr/>
+        </p:nvSpPr>
+        <p:spPr>
+          <a:xfrm>
+            <a:off x="9509759" y="1481328"/>
+            <a:ext cx="2103120" cy="566928"/>
+          </a:xfrm>
+          <a:prstGeom prst="roundRect">
+            <a:avLst/>
+          </a:prstGeom>
+          <a:solidFill>
+            <a:srgbClr val="3E6B5A"/>
+          </a:solidFill>
+          <a:ln>
+            <a:noFill/>
+          </a:ln>
+          <a:effectLst/>
+        </p:spPr>
+        <p:style>
+          <a:lnRef idx="1">
+            <a:schemeClr val="accent1"/>
+          </a:lnRef>
+          <a:fillRef idx="3">
+            <a:schemeClr val="accent1"/>
+          </a:fillRef>
+          <a:effectRef idx="2">
+            <a:schemeClr val="accent1"/>
+          </a:effectRef>
+          <a:fontRef idx="minor">
+            <a:schemeClr val="lt1"/>
+          </a:fontRef>
+        </p:style>
+        <p:txBody>
+          <a:bodyPr rtlCol="0" anchor="ctr" lIns="0" rIns="0" tIns="0" bIns="0"/>
+          <a:lstStyle/>
+          <a:p>
+            <a:pPr algn="ctr"/>
+            <a:r>
+              <a:rPr sz="1300" b="1">
+                <a:solidFill>
+                  <a:srgbClr val="FFFFFF"/>
+                </a:solidFill>
+                <a:latin typeface="Microsoft JhengHei"/>
+              </a:rPr>
+              <a:t>5. 文風檢查</a:t>
+            </a:r>
+          </a:p>
+        </p:txBody>
+      </p:sp>
+      <p:sp>
+        <p:nvSpPr>
+          <p:cNvPr id="32" name="Rounded Rectangle 31"/>
+          <p:cNvSpPr/>
+          <p:nvPr/>
+        </p:nvSpPr>
+        <p:spPr>
+          <a:xfrm>
+            <a:off x="548640" y="2194560"/>
+            <a:ext cx="2103120" cy="566928"/>
+          </a:xfrm>
+          <a:prstGeom prst="roundRect">
+            <a:avLst/>
+          </a:prstGeom>
+          <a:solidFill>
+            <a:srgbClr val="EADBD3"/>
+          </a:solidFill>
+          <a:ln>
+            <a:noFill/>
+          </a:ln>
+          <a:effectLst/>
+        </p:spPr>
+        <p:style>
+          <a:lnRef idx="1">
+            <a:schemeClr val="accent1"/>
+          </a:lnRef>
+          <a:fillRef idx="3">
+            <a:schemeClr val="accent1"/>
+          </a:fillRef>
+          <a:effectRef idx="2">
+            <a:schemeClr val="accent1"/>
+          </a:effectRef>
+          <a:fontRef idx="minor">
+            <a:schemeClr val="lt1"/>
+          </a:fontRef>
+        </p:style>
+        <p:txBody>
+          <a:bodyPr rtlCol="0" anchor="ctr" lIns="0" rIns="0" tIns="0" bIns="0"/>
+          <a:lstStyle/>
+          <a:p>
+            <a:pPr algn="ctr"/>
+            <a:r>
+              <a:rPr sz="1300" b="1">
+                <a:solidFill>
+                  <a:srgbClr val="2B2420"/>
+                </a:solidFill>
+                <a:latin typeface="Microsoft JhengHei"/>
+              </a:rPr>
+              <a:t>6. 審查</a:t>
+            </a:r>
+          </a:p>
+        </p:txBody>
+      </p:sp>
+      <p:sp>
+        <p:nvSpPr>
+          <p:cNvPr id="33" name="Rounded Rectangle 32"/>
+          <p:cNvSpPr/>
+          <p:nvPr/>
+        </p:nvSpPr>
+        <p:spPr>
+          <a:xfrm>
+            <a:off x="2788920" y="2194560"/>
+            <a:ext cx="2103120" cy="566928"/>
+          </a:xfrm>
+          <a:prstGeom prst="roundRect">
+            <a:avLst/>
+          </a:prstGeom>
+          <a:solidFill>
+            <a:srgbClr val="3E6B5A"/>
+          </a:solidFill>
+          <a:ln>
+            <a:noFill/>
+          </a:ln>
+          <a:effectLst/>
+        </p:spPr>
+        <p:style>
+          <a:lnRef idx="1">
+            <a:schemeClr val="accent1"/>
+          </a:lnRef>
+          <a:fillRef idx="3">
+            <a:schemeClr val="accent1"/>
+          </a:fillRef>
+          <a:effectRef idx="2">
+            <a:schemeClr val="accent1"/>
+          </a:effectRef>
+          <a:fontRef idx="minor">
+            <a:schemeClr val="lt1"/>
+          </a:fontRef>
+        </p:style>
+        <p:txBody>
+          <a:bodyPr rtlCol="0" anchor="ctr" lIns="0" rIns="0" tIns="0" bIns="0"/>
+          <a:lstStyle/>
+          <a:p>
+            <a:pPr algn="ctr"/>
+            <a:r>
+              <a:rPr sz="1300" b="1">
+                <a:solidFill>
+                  <a:srgbClr val="FFFFFF"/>
+                </a:solidFill>
+                <a:latin typeface="Microsoft JhengHei"/>
+              </a:rPr>
+              <a:t>7. 自動勾選</a:t>
+            </a:r>
+          </a:p>
+        </p:txBody>
+      </p:sp>
+      <p:sp>
+        <p:nvSpPr>
+          <p:cNvPr id="34" name="Rounded Rectangle 33"/>
+          <p:cNvSpPr/>
+          <p:nvPr/>
+        </p:nvSpPr>
+        <p:spPr>
+          <a:xfrm>
+            <a:off x="5029199" y="2194560"/>
+            <a:ext cx="2103120" cy="566928"/>
+          </a:xfrm>
+          <a:prstGeom prst="roundRect">
+            <a:avLst/>
+          </a:prstGeom>
+          <a:solidFill>
+            <a:srgbClr val="EADBD3"/>
+          </a:solidFill>
+          <a:ln>
+            <a:noFill/>
+          </a:ln>
+          <a:effectLst/>
+        </p:spPr>
+        <p:style>
+          <a:lnRef idx="1">
+            <a:schemeClr val="accent1"/>
+          </a:lnRef>
+          <a:fillRef idx="3">
+            <a:schemeClr val="accent1"/>
+          </a:fillRef>
+          <a:effectRef idx="2">
+            <a:schemeClr val="accent1"/>
+          </a:effectRef>
+          <a:fontRef idx="minor">
+            <a:schemeClr val="lt1"/>
+          </a:fontRef>
+        </p:style>
+        <p:txBody>
+          <a:bodyPr rtlCol="0" anchor="ctr" lIns="0" rIns="0" tIns="0" bIns="0"/>
+          <a:lstStyle/>
+          <a:p>
+            <a:pPr algn="ctr"/>
+            <a:r>
+              <a:rPr sz="1300" b="1">
+                <a:solidFill>
+                  <a:srgbClr val="2B2420"/>
+                </a:solidFill>
+                <a:latin typeface="Microsoft JhengHei"/>
+              </a:rPr>
+              <a:t>8. 修訂</a:t>
+            </a:r>
+          </a:p>
+        </p:txBody>
+      </p:sp>
+      <p:sp>
+        <p:nvSpPr>
+          <p:cNvPr id="35" name="Rounded Rectangle 34"/>
+          <p:cNvSpPr/>
+          <p:nvPr/>
+        </p:nvSpPr>
+        <p:spPr>
+          <a:xfrm>
+            <a:off x="7269479" y="2194560"/>
+            <a:ext cx="2103120" cy="566928"/>
+          </a:xfrm>
+          <a:prstGeom prst="roundRect">
+            <a:avLst/>
+          </a:prstGeom>
+          <a:solidFill>
+            <a:srgbClr val="3E6B5A"/>
+          </a:solidFill>
+          <a:ln>
+            <a:noFill/>
+          </a:ln>
+          <a:effectLst/>
+        </p:spPr>
+        <p:style>
+          <a:lnRef idx="1">
+            <a:schemeClr val="accent1"/>
+          </a:lnRef>
+          <a:fillRef idx="3">
+            <a:schemeClr val="accent1"/>
+          </a:fillRef>
+          <a:effectRef idx="2">
+            <a:schemeClr val="accent1"/>
+          </a:effectRef>
+          <a:fontRef idx="minor">
+            <a:schemeClr val="lt1"/>
+          </a:fontRef>
+        </p:style>
+        <p:txBody>
+          <a:bodyPr rtlCol="0" anchor="ctr" lIns="0" rIns="0" tIns="0" bIns="0"/>
+          <a:lstStyle/>
+          <a:p>
+            <a:pPr algn="ctr"/>
+            <a:r>
+              <a:rPr sz="1300" b="1">
+                <a:solidFill>
+                  <a:srgbClr val="FFFFFF"/>
+                </a:solidFill>
+                <a:latin typeface="Microsoft JhengHei"/>
+              </a:rPr>
+              <a:t>9. 套用</a:t>
+            </a:r>
+          </a:p>
+        </p:txBody>
+      </p:sp>
+      <p:sp>
+        <p:nvSpPr>
+          <p:cNvPr id="36" name="Rounded Rectangle 35"/>
+          <p:cNvSpPr/>
+          <p:nvPr/>
+        </p:nvSpPr>
+        <p:spPr>
+          <a:xfrm>
+            <a:off x="9509759" y="2194560"/>
+            <a:ext cx="2103120" cy="566928"/>
+          </a:xfrm>
+          <a:prstGeom prst="roundRect">
+            <a:avLst/>
+          </a:prstGeom>
+          <a:solidFill>
+            <a:srgbClr val="EADBD3"/>
+          </a:solidFill>
+          <a:ln>
+            <a:noFill/>
+          </a:ln>
+          <a:effectLst/>
+        </p:spPr>
+        <p:style>
+          <a:lnRef idx="1">
+            <a:schemeClr val="accent1"/>
+          </a:lnRef>
+          <a:fillRef idx="3">
+            <a:schemeClr val="accent1"/>
+          </a:fillRef>
+          <a:effectRef idx="2">
+            <a:schemeClr val="accent1"/>
+          </a:effectRef>
+          <a:fontRef idx="minor">
+            <a:schemeClr val="lt1"/>
+          </a:fontRef>
+        </p:style>
+        <p:txBody>
+          <a:bodyPr rtlCol="0" anchor="ctr" lIns="0" rIns="0" tIns="0" bIns="0"/>
+          <a:lstStyle/>
+          <a:p>
+            <a:pPr algn="ctr"/>
+            <a:r>
+              <a:rPr sz="1300" b="1">
+                <a:solidFill>
+                  <a:srgbClr val="2B2420"/>
+                </a:solidFill>
+                <a:latin typeface="Microsoft JhengHei"/>
+              </a:rPr>
+              <a:t>10. 定稿回寫</a:t>
+            </a:r>
+          </a:p>
+        </p:txBody>
+      </p:sp>
+      <p:sp>
+        <p:nvSpPr>
+          <p:cNvPr id="37" name="Rounded Rectangle 36"/>
+          <p:cNvSpPr/>
+          <p:nvPr/>
+        </p:nvSpPr>
+        <p:spPr>
+          <a:xfrm>
+            <a:off x="548640" y="2834640"/>
+            <a:ext cx="201168" cy="201168"/>
+          </a:xfrm>
+          <a:prstGeom prst="roundRect">
+            <a:avLst/>
+          </a:prstGeom>
+          <a:solidFill>
+            <a:srgbClr val="EADBD3"/>
+          </a:solidFill>
+          <a:ln>
+            <a:noFill/>
+          </a:ln>
+          <a:effectLst/>
+        </p:spPr>
+        <p:style>
+          <a:lnRef idx="1">
+            <a:schemeClr val="accent1"/>
+          </a:lnRef>
+          <a:fillRef idx="3">
+            <a:schemeClr val="accent1"/>
+          </a:fillRef>
+          <a:effectRef idx="2">
+            <a:schemeClr val="accent1"/>
+          </a:effectRef>
+          <a:fontRef idx="minor">
+            <a:schemeClr val="lt1"/>
+          </a:fontRef>
+        </p:style>
+        <p:txBody>
+          <a:bodyPr rtlCol="0" anchor="ctr"/>
+          <a:lstStyle/>
+          <a:p>
+            <a:pPr algn="ctr"/>
+          </a:p>
+        </p:txBody>
+      </p:sp>
+      <p:sp>
+        <p:nvSpPr>
+          <p:cNvPr id="38" name="TextBox 37"/>
+          <p:cNvSpPr txBox="1"/>
+          <p:nvPr/>
+        </p:nvSpPr>
+        <p:spPr>
+          <a:xfrm>
+            <a:off x="822960" y="2798064"/>
+            <a:ext cx="2103120" cy="274320"/>
+          </a:xfrm>
+          <a:prstGeom prst="rect">
+            <a:avLst/>
+          </a:prstGeom>
+          <a:noFill/>
+        </p:spPr>
+        <p:txBody>
+          <a:bodyPr wrap="square" lIns="0" rIns="0" tIns="0" bIns="0" anchor="t">
+            <a:spAutoFit/>
+          </a:bodyPr>
+          <a:lstStyle/>
+          <a:p>
+            <a:pPr algn="l">
+              <a:lnSpc>
+                <a:spcPct val="112000"/>
+              </a:lnSpc>
+              <a:spcAft>
+                <a:spcPts val="300"/>
+              </a:spcAft>
+            </a:pPr>
+            <a:r>
+              <a:rPr sz="1100" b="0">
+                <a:solidFill>
+                  <a:srgbClr val="6B6258"/>
+                </a:solidFill>
+                <a:latin typeface="Microsoft JhengHei"/>
+              </a:rPr>
+              <a:t>米色：呼叫 AI（7 步）</a:t>
+            </a:r>
+          </a:p>
+        </p:txBody>
+      </p:sp>
+      <p:sp>
+        <p:nvSpPr>
+          <p:cNvPr id="39" name="Rounded Rectangle 38"/>
+          <p:cNvSpPr/>
+          <p:nvPr/>
+        </p:nvSpPr>
+        <p:spPr>
+          <a:xfrm>
+            <a:off x="3246120" y="2834640"/>
+            <a:ext cx="201168" cy="201168"/>
+          </a:xfrm>
+          <a:prstGeom prst="roundRect">
+            <a:avLst/>
+          </a:prstGeom>
+          <a:solidFill>
+            <a:srgbClr val="3E6B5A"/>
+          </a:solidFill>
+          <a:ln>
+            <a:noFill/>
+          </a:ln>
+          <a:effectLst/>
+        </p:spPr>
+        <p:style>
+          <a:lnRef idx="1">
+            <a:schemeClr val="accent1"/>
+          </a:lnRef>
+          <a:fillRef idx="3">
+            <a:schemeClr val="accent1"/>
+          </a:fillRef>
+          <a:effectRef idx="2">
+            <a:schemeClr val="accent1"/>
+          </a:effectRef>
+          <a:fontRef idx="minor">
+            <a:schemeClr val="lt1"/>
+          </a:fontRef>
+        </p:style>
+        <p:txBody>
+          <a:bodyPr rtlCol="0" anchor="ctr"/>
+          <a:lstStyle/>
+          <a:p>
+            <a:pPr algn="ctr"/>
+          </a:p>
+        </p:txBody>
+      </p:sp>
+      <p:sp>
+        <p:nvSpPr>
+          <p:cNvPr id="40" name="TextBox 39"/>
+          <p:cNvSpPr txBox="1"/>
+          <p:nvPr/>
+        </p:nvSpPr>
+        <p:spPr>
+          <a:xfrm>
+            <a:off x="3520440" y="2798064"/>
+            <a:ext cx="2377440" cy="274320"/>
+          </a:xfrm>
+          <a:prstGeom prst="rect">
+            <a:avLst/>
+          </a:prstGeom>
+          <a:noFill/>
+        </p:spPr>
+        <p:txBody>
+          <a:bodyPr wrap="square" lIns="0" rIns="0" tIns="0" bIns="0" anchor="t">
+            <a:spAutoFit/>
+          </a:bodyPr>
+          <a:lstStyle/>
+          <a:p>
+            <a:pPr algn="l">
+              <a:lnSpc>
+                <a:spcPct val="112000"/>
+              </a:lnSpc>
+              <a:spcAft>
+                <a:spcPts val="300"/>
+              </a:spcAft>
+            </a:pPr>
+            <a:r>
+              <a:rPr sz="1100" b="0">
+                <a:solidFill>
+                  <a:srgbClr val="6B6258"/>
+                </a:solidFill>
+                <a:latin typeface="Microsoft JhengHei"/>
+              </a:rPr>
+              <a:t>綠色：本機計算（3 步）</a:t>
+            </a:r>
+          </a:p>
+        </p:txBody>
+      </p:sp>
+      <p:sp>
+        <p:nvSpPr>
+          <p:cNvPr id="41" name="Rounded Rectangle 40"/>
+          <p:cNvSpPr/>
+          <p:nvPr/>
+        </p:nvSpPr>
+        <p:spPr>
+          <a:xfrm>
+            <a:off x="548640" y="3246120"/>
+            <a:ext cx="11091672" cy="2971800"/>
+          </a:xfrm>
+          <a:prstGeom prst="roundRect">
+            <a:avLst/>
+          </a:prstGeom>
+          <a:solidFill>
+            <a:srgbClr val="F3E6DF"/>
+          </a:solidFill>
+          <a:ln>
+            <a:noFill/>
+          </a:ln>
+          <a:effectLst/>
+        </p:spPr>
+        <p:style>
+          <a:lnRef idx="1">
+            <a:schemeClr val="accent1"/>
+          </a:lnRef>
+          <a:fillRef idx="3">
+            <a:schemeClr val="accent1"/>
+          </a:fillRef>
+          <a:effectRef idx="2">
+            <a:schemeClr val="accent1"/>
+          </a:effectRef>
+          <a:fontRef idx="minor">
+            <a:schemeClr val="lt1"/>
+          </a:fontRef>
+        </p:style>
+        <p:txBody>
+          <a:bodyPr rtlCol="0" anchor="ctr"/>
+          <a:lstStyle/>
+          <a:p>
+            <a:pPr algn="ctr"/>
+          </a:p>
+        </p:txBody>
+      </p:sp>
+      <p:sp>
+        <p:nvSpPr>
+          <p:cNvPr id="42" name="TextBox 41"/>
+          <p:cNvSpPr txBox="1"/>
+          <p:nvPr/>
+        </p:nvSpPr>
+        <p:spPr>
+          <a:xfrm>
+            <a:off x="822960" y="3429000"/>
+            <a:ext cx="10515600" cy="347472"/>
+          </a:xfrm>
+          <a:prstGeom prst="rect">
+            <a:avLst/>
+          </a:prstGeom>
+          <a:noFill/>
+        </p:spPr>
+        <p:txBody>
+          <a:bodyPr wrap="square" lIns="0" rIns="0" tIns="0" bIns="0" anchor="t">
+            <a:spAutoFit/>
+          </a:bodyPr>
+          <a:lstStyle/>
+          <a:p>
+            <a:pPr algn="l">
+              <a:lnSpc>
+                <a:spcPct val="112000"/>
+              </a:lnSpc>
+              <a:spcAft>
+                <a:spcPts val="300"/>
+              </a:spcAft>
+            </a:pPr>
+            <a:r>
+              <a:rPr sz="1400" b="1">
+                <a:solidFill>
+                  <a:srgbClr val="2B2420"/>
+                </a:solidFill>
+                <a:latin typeface="Microsoft JhengHei"/>
+              </a:rPr>
+              <a:t>總覽或章節頁按「⚡ 整章自動」，選章節範圍；預設寫一章停一章。</a:t>
+            </a:r>
+          </a:p>
+        </p:txBody>
+      </p:sp>
+      <p:sp>
+        <p:nvSpPr>
+          <p:cNvPr id="43" name="TextBox 42"/>
+          <p:cNvSpPr txBox="1"/>
+          <p:nvPr/>
+        </p:nvSpPr>
+        <p:spPr>
+          <a:xfrm>
+            <a:off x="822960" y="3840480"/>
+            <a:ext cx="10515600" cy="2103120"/>
+          </a:xfrm>
+          <a:prstGeom prst="rect">
+            <a:avLst/>
+          </a:prstGeom>
+          <a:noFill/>
+        </p:spPr>
+        <p:txBody>
+          <a:bodyPr wrap="square" lIns="0" rIns="0" tIns="0" bIns="0" anchor="t">
+            <a:spAutoFit/>
+          </a:bodyPr>
+          <a:lstStyle/>
+          <a:p>
+            <a:pPr algn="l">
+              <a:lnSpc>
+                <a:spcPct val="125000"/>
+              </a:lnSpc>
+              <a:spcAft>
+                <a:spcPts val="600"/>
+              </a:spcAft>
+            </a:pPr>
+            <a:r>
+              <a:rPr sz="1350" b="0">
+                <a:solidFill>
+                  <a:srgbClr val="5A514A"/>
+                </a:solidFill>
+                <a:latin typeface="Microsoft JhengHei"/>
+              </a:rPr>
+              <a:t>失敗會停在那一步，修好可以從那一步繼續；重開工作台進度還在。</a:t>
+            </a:r>
+          </a:p>
+          <a:p>
+            <a:pPr algn="l">
+              <a:lnSpc>
+                <a:spcPct val="125000"/>
+              </a:lnSpc>
+              <a:spcAft>
+                <a:spcPts val="600"/>
+              </a:spcAft>
+            </a:pPr>
+            <a:r>
+              <a:rPr sz="1350" b="0">
+                <a:solidFill>
+                  <a:srgbClr val="5A514A"/>
+                </a:solidFill>
+                <a:latin typeface="Microsoft JhengHei"/>
+              </a:rPr>
+              <a:t>文風檢查、自動勾選、全部套用不花 token；7 個 AI 步驟可以各自指定執行者。</a:t>
+            </a:r>
+          </a:p>
+          <a:p>
+            <a:pPr algn="l">
+              <a:lnSpc>
+                <a:spcPct val="125000"/>
+              </a:lnSpc>
+              <a:spcAft>
+                <a:spcPts val="600"/>
+              </a:spcAft>
+            </a:pPr>
+            <a:r>
+              <a:rPr sz="1350" b="0">
+                <a:solidFill>
+                  <a:srgbClr val="5A514A"/>
+                </a:solidFill>
+                <a:latin typeface="Microsoft JhengHei"/>
+              </a:rPr>
+              <a:t>開跑前會先掃章綱：有提前登場就拒絕；「禁止事項」裡的「不得登場」不算登場。</a:t>
+            </a:r>
+          </a:p>
+          <a:p>
+            <a:pPr algn="l">
+              <a:lnSpc>
+                <a:spcPct val="125000"/>
+              </a:lnSpc>
+              <a:spcAft>
+                <a:spcPts val="600"/>
+              </a:spcAft>
+            </a:pPr>
+            <a:r>
+              <a:rPr sz="1350" b="0">
+                <a:solidFill>
+                  <a:srgbClr val="5A514A"/>
+                </a:solidFill>
+                <a:latin typeface="Microsoft JhengHei"/>
+              </a:rPr>
+              <a:t>定稿後才回寫追蹤；每一步的結果都看得到，不是一次黑箱跑完。</a:t>
+            </a:r>
           </a:p>
         </p:txBody>
       </p:sp>
@@ -7339,7 +7785,7 @@
                   <a:schemeClr val="bg1"/>
                 </a:solidFill>
               </a:rPr>
-              <a:t>管好長篇</a:t>
+              <a:t>管好長篇：設定與護欄</a:t>
             </a:r>
             <a:endParaRPr lang="en-US" sz="4000" dirty="0"/>
           </a:p>
@@ -7377,7 +7823,7 @@
                   <a:srgbClr val="F2E3D3"/>
                 </a:solidFill>
               </a:rPr>
-              <a:t>伏筆、時間線、搜尋、舊稿與匯出</a:t>
+              <a:t>設定集、伏筆、時間線、舊稿與匯出</a:t>
             </a:r>
             <a:endParaRPr lang="en-US" sz="1800" dirty="0"/>
           </a:p>
@@ -10017,6 +10463,48 @@
           </a:p>
         </p:txBody>
       </p:sp>
+      <p:sp>
+        <p:nvSpPr>
+          <p:cNvPr id="26" name="TextBox 25"/>
+          <p:cNvSpPr txBox="1"/>
+          <p:nvPr/>
+        </p:nvSpPr>
+        <p:spPr>
+          <a:xfrm>
+            <a:off x="548640" y="6144768"/>
+            <a:ext cx="10424160" cy="292608"/>
+          </a:xfrm>
+          <a:prstGeom prst="rect">
+            <a:avLst/>
+          </a:prstGeom>
+          <a:noFill/>
+        </p:spPr>
+        <p:txBody>
+          <a:bodyPr wrap="square" lIns="0" rIns="0" tIns="0" bIns="0" anchor="t">
+            <a:spAutoFit/>
+          </a:bodyPr>
+          <a:lstStyle/>
+          <a:p>
+            <a:pPr algn="l">
+              <a:lnSpc>
+                <a:spcPct val="112000"/>
+              </a:lnSpc>
+              <a:spcAft>
+                <a:spcPts val="300"/>
+              </a:spcAft>
+            </a:pPr>
+            <a:r>
+              <a:rPr sz="1100" b="0">
+                <a:solidFill>
+                  <a:srgbClr val="6B6258"/>
+                </a:solidFill>
+                <a:latin typeface="Microsoft JhengHei"/>
+              </a:rPr>
+              <a:t>v1.18 新增：卷先行、設定集生成與安全刪除、用參考書骨架直接開書</a:t>
+            </a:r>
+          </a:p>
+        </p:txBody>
+      </p:sp>
     </p:spTree>
   </p:cSld>
   <p:clrMapOvr>
@@ -10920,7 +11408,7 @@
                   <a:schemeClr val="tx1"/>
                 </a:solidFill>
               </a:rPr>
-              <a:t>任務紀錄說「上下文超出長度，略過…」</a:t>
+              <a:t>設定集可以刪除嗎？</a:t>
             </a:r>
             <a:endParaRPr lang="en-US" sz="1600" dirty="0"/>
           </a:p>
@@ -10956,7 +11444,7 @@
                   <a:srgbClr val="5A514A"/>
                 </a:solidFill>
               </a:rPr>
-              <a:t>不是錯誤，章節照常寫，只是少帶了最不重要的參考。可以調整上下文長度或最大輸出。</a:t>
+              <a:t>可以。選角色、勢力、世界觀或草稿，按「刪除這份」；檔案移到 .studio/刪除，不會永久刪除。</a:t>
             </a:r>
             <a:endParaRPr lang="en-US" sz="1500" dirty="0"/>
           </a:p>
@@ -11142,6 +11630,48 @@
               <a:t>21</a:t>
             </a:fld>
             <a:endParaRPr lang="en-US"/>
+          </a:p>
+        </p:txBody>
+      </p:sp>
+      <p:sp>
+        <p:nvSpPr>
+          <p:cNvPr id="26" name="TextBox 25"/>
+          <p:cNvSpPr txBox="1"/>
+          <p:nvPr/>
+        </p:nvSpPr>
+        <p:spPr>
+          <a:xfrm>
+            <a:off x="548640" y="6080760"/>
+            <a:ext cx="10424160" cy="274320"/>
+          </a:xfrm>
+          <a:prstGeom prst="rect">
+            <a:avLst/>
+          </a:prstGeom>
+          <a:noFill/>
+        </p:spPr>
+        <p:txBody>
+          <a:bodyPr wrap="square" lIns="0" rIns="0" tIns="0" bIns="0" anchor="t">
+            <a:spAutoFit/>
+          </a:bodyPr>
+          <a:lstStyle/>
+          <a:p>
+            <a:pPr algn="l">
+              <a:lnSpc>
+                <a:spcPct val="112000"/>
+              </a:lnSpc>
+              <a:spcAft>
+                <a:spcPts val="300"/>
+              </a:spcAft>
+            </a:pPr>
+            <a:r>
+              <a:rPr sz="1100" b="0">
+                <a:solidFill>
+                  <a:srgbClr val="6B6258"/>
+                </a:solidFill>
+                <a:latin typeface="Microsoft JhengHei"/>
+              </a:rPr>
+              <a:t>更多問題：左側「說明」→ 常見問題；或從最底下的「回報問題」開 issue。</a:t>
+            </a:r>
           </a:p>
         </p:txBody>
       </p:sp>
@@ -11668,9 +12198,2429 @@
                   <a:srgbClr val="C9BBAA"/>
                 </a:solidFill>
               </a:rPr>
-              <a:t>GitHub：yamasoo/novel-studio　・　有問題按左側欄最底下的「回報問題」</a:t>
+              <a:t>GitHub：yamasoo/novel-studio　・　先看左側「說明」　・　有問題按最底下的「回報問題」</a:t>
             </a:r>
             <a:endParaRPr lang="en-US" sz="1300" dirty="0"/>
+          </a:p>
+        </p:txBody>
+      </p:sp>
+    </p:spTree>
+  </p:cSld>
+  <p:clrMapOvr>
+    <a:masterClrMapping/>
+  </p:clrMapOvr>
+</p:sld>
+</file>
+
+<file path=ppt/slides/slide23.xml><?xml version="1.0" encoding="utf-8"?>
+<p:sld xmlns:a="http://schemas.openxmlformats.org/drawingml/2006/main" xmlns:p="http://schemas.openxmlformats.org/presentationml/2006/main" xmlns:r="http://schemas.openxmlformats.org/officeDocument/2006/relationships">
+  <p:cSld>
+    <p:spTree>
+      <p:nvGrpSpPr>
+        <p:cNvPr id="1" name=""/>
+        <p:cNvGrpSpPr/>
+        <p:nvPr/>
+      </p:nvGrpSpPr>
+      <p:grpSpPr/>
+      <p:sp>
+        <p:nvSpPr>
+          <p:cNvPr id="2" name="Title 1"/>
+          <p:cNvSpPr>
+            <a:spLocks noGrp="1"/>
+          </p:cNvSpPr>
+          <p:nvPr>
+            <p:ph type="title" idx="100"/>
+          </p:nvPr>
+        </p:nvSpPr>
+        <p:spPr/>
+        <p:txBody>
+          <a:bodyPr/>
+          <a:lstStyle/>
+          <a:p>
+            <a:r>
+              <a:t>卷先行：先排卷，再排章綱</a:t>
+            </a:r>
+          </a:p>
+        </p:txBody>
+      </p:sp>
+      <p:sp>
+        <p:nvSpPr>
+          <p:cNvPr id="3" name="TextBox 2"/>
+          <p:cNvSpPr txBox="1"/>
+          <p:nvPr/>
+        </p:nvSpPr>
+        <p:spPr>
+          <a:xfrm>
+            <a:off x="548640" y="1024128"/>
+            <a:ext cx="11064240" cy="310896"/>
+          </a:xfrm>
+          <a:prstGeom prst="rect">
+            <a:avLst/>
+          </a:prstGeom>
+          <a:noFill/>
+        </p:spPr>
+        <p:txBody>
+          <a:bodyPr wrap="square" lIns="0" rIns="0" tIns="0" bIns="0" anchor="t">
+            <a:spAutoFit/>
+          </a:bodyPr>
+          <a:lstStyle/>
+          <a:p>
+            <a:pPr algn="l">
+              <a:lnSpc>
+                <a:spcPct val="112000"/>
+              </a:lnSpc>
+              <a:spcAft>
+                <a:spcPts val="300"/>
+              </a:spcAft>
+            </a:pPr>
+            <a:r>
+              <a:rPr sz="1300" b="0">
+                <a:solidFill>
+                  <a:srgbClr val="6B6258"/>
+                </a:solidFill>
+                <a:latin typeface="Microsoft JhengHei"/>
+              </a:rPr>
+              <a:t>長篇不先切好卷，後面很容易失控；每一卷都有自己的章節範圍</a:t>
+            </a:r>
+          </a:p>
+        </p:txBody>
+      </p:sp>
+      <p:sp>
+        <p:nvSpPr>
+          <p:cNvPr id="4" name="Chevron 3"/>
+          <p:cNvSpPr/>
+          <p:nvPr/>
+        </p:nvSpPr>
+        <p:spPr>
+          <a:xfrm>
+            <a:off x="548640" y="1481328"/>
+            <a:ext cx="2606040" cy="1170432"/>
+          </a:xfrm>
+          <a:prstGeom prst="chevron">
+            <a:avLst/>
+          </a:prstGeom>
+          <a:solidFill>
+            <a:srgbClr val="8A3B2E"/>
+          </a:solidFill>
+          <a:ln>
+            <a:noFill/>
+          </a:ln>
+          <a:effectLst/>
+        </p:spPr>
+        <p:style>
+          <a:lnRef idx="1">
+            <a:schemeClr val="accent1"/>
+          </a:lnRef>
+          <a:fillRef idx="3">
+            <a:schemeClr val="accent1"/>
+          </a:fillRef>
+          <a:effectRef idx="2">
+            <a:schemeClr val="accent1"/>
+          </a:effectRef>
+          <a:fontRef idx="minor">
+            <a:schemeClr val="lt1"/>
+          </a:fontRef>
+        </p:style>
+        <p:txBody>
+          <a:bodyPr rtlCol="0" anchor="ctr"/>
+          <a:lstStyle/>
+          <a:p>
+            <a:pPr algn="ctr"/>
+          </a:p>
+        </p:txBody>
+      </p:sp>
+      <p:sp>
+        <p:nvSpPr>
+          <p:cNvPr id="5" name="TextBox 4"/>
+          <p:cNvSpPr txBox="1"/>
+          <p:nvPr/>
+        </p:nvSpPr>
+        <p:spPr>
+          <a:xfrm>
+            <a:off x="932688" y="1645920"/>
+            <a:ext cx="1920240" cy="384048"/>
+          </a:xfrm>
+          <a:prstGeom prst="rect">
+            <a:avLst/>
+          </a:prstGeom>
+          <a:noFill/>
+        </p:spPr>
+        <p:txBody>
+          <a:bodyPr wrap="square" lIns="0" rIns="0" tIns="0" bIns="0" anchor="t">
+            <a:spAutoFit/>
+          </a:bodyPr>
+          <a:lstStyle/>
+          <a:p>
+            <a:pPr algn="ctr">
+              <a:lnSpc>
+                <a:spcPct val="112000"/>
+              </a:lnSpc>
+              <a:spcAft>
+                <a:spcPts val="300"/>
+              </a:spcAft>
+            </a:pPr>
+            <a:r>
+              <a:rPr sz="1550" b="1">
+                <a:solidFill>
+                  <a:srgbClr val="FFFFFF"/>
+                </a:solidFill>
+                <a:latin typeface="Microsoft JhengHei"/>
+              </a:rPr>
+              <a:t>卷綱草稿</a:t>
+            </a:r>
+          </a:p>
+        </p:txBody>
+      </p:sp>
+      <p:sp>
+        <p:nvSpPr>
+          <p:cNvPr id="6" name="TextBox 5"/>
+          <p:cNvSpPr txBox="1"/>
+          <p:nvPr/>
+        </p:nvSpPr>
+        <p:spPr>
+          <a:xfrm>
+            <a:off x="932688" y="2048256"/>
+            <a:ext cx="1920240" cy="365760"/>
+          </a:xfrm>
+          <a:prstGeom prst="rect">
+            <a:avLst/>
+          </a:prstGeom>
+          <a:noFill/>
+        </p:spPr>
+        <p:txBody>
+          <a:bodyPr wrap="square" lIns="0" rIns="0" tIns="0" bIns="0" anchor="t">
+            <a:spAutoFit/>
+          </a:bodyPr>
+          <a:lstStyle/>
+          <a:p>
+            <a:pPr algn="ctr">
+              <a:lnSpc>
+                <a:spcPct val="112000"/>
+              </a:lnSpc>
+              <a:spcAft>
+                <a:spcPts val="300"/>
+              </a:spcAft>
+            </a:pPr>
+            <a:r>
+              <a:rPr sz="1150" b="0">
+                <a:solidFill>
+                  <a:srgbClr val="FFFFFF"/>
+                </a:solidFill>
+                <a:latin typeface="Microsoft JhengHei"/>
+              </a:rPr>
+              <a:t>依全書大綱排這一卷</a:t>
+            </a:r>
+          </a:p>
+        </p:txBody>
+      </p:sp>
+      <p:sp>
+        <p:nvSpPr>
+          <p:cNvPr id="7" name="Chevron 6"/>
+          <p:cNvSpPr/>
+          <p:nvPr/>
+        </p:nvSpPr>
+        <p:spPr>
+          <a:xfrm>
+            <a:off x="3291840" y="1481328"/>
+            <a:ext cx="2606040" cy="1170432"/>
+          </a:xfrm>
+          <a:prstGeom prst="chevron">
+            <a:avLst/>
+          </a:prstGeom>
+          <a:solidFill>
+            <a:srgbClr val="EADBD3"/>
+          </a:solidFill>
+          <a:ln>
+            <a:noFill/>
+          </a:ln>
+          <a:effectLst/>
+        </p:spPr>
+        <p:style>
+          <a:lnRef idx="1">
+            <a:schemeClr val="accent1"/>
+          </a:lnRef>
+          <a:fillRef idx="3">
+            <a:schemeClr val="accent1"/>
+          </a:fillRef>
+          <a:effectRef idx="2">
+            <a:schemeClr val="accent1"/>
+          </a:effectRef>
+          <a:fontRef idx="minor">
+            <a:schemeClr val="lt1"/>
+          </a:fontRef>
+        </p:style>
+        <p:txBody>
+          <a:bodyPr rtlCol="0" anchor="ctr"/>
+          <a:lstStyle/>
+          <a:p>
+            <a:pPr algn="ctr"/>
+          </a:p>
+        </p:txBody>
+      </p:sp>
+      <p:sp>
+        <p:nvSpPr>
+          <p:cNvPr id="8" name="TextBox 7"/>
+          <p:cNvSpPr txBox="1"/>
+          <p:nvPr/>
+        </p:nvSpPr>
+        <p:spPr>
+          <a:xfrm>
+            <a:off x="3675888" y="1645920"/>
+            <a:ext cx="1920240" cy="384048"/>
+          </a:xfrm>
+          <a:prstGeom prst="rect">
+            <a:avLst/>
+          </a:prstGeom>
+          <a:noFill/>
+        </p:spPr>
+        <p:txBody>
+          <a:bodyPr wrap="square" lIns="0" rIns="0" tIns="0" bIns="0" anchor="t">
+            <a:spAutoFit/>
+          </a:bodyPr>
+          <a:lstStyle/>
+          <a:p>
+            <a:pPr algn="ctr">
+              <a:lnSpc>
+                <a:spcPct val="112000"/>
+              </a:lnSpc>
+              <a:spcAft>
+                <a:spcPts val="300"/>
+              </a:spcAft>
+            </a:pPr>
+            <a:r>
+              <a:rPr sz="1550" b="1">
+                <a:solidFill>
+                  <a:srgbClr val="2B2420"/>
+                </a:solidFill>
+                <a:latin typeface="Microsoft JhengHei"/>
+              </a:rPr>
+              <a:t>看過再採用</a:t>
+            </a:r>
+          </a:p>
+        </p:txBody>
+      </p:sp>
+      <p:sp>
+        <p:nvSpPr>
+          <p:cNvPr id="9" name="TextBox 8"/>
+          <p:cNvSpPr txBox="1"/>
+          <p:nvPr/>
+        </p:nvSpPr>
+        <p:spPr>
+          <a:xfrm>
+            <a:off x="3675888" y="2048256"/>
+            <a:ext cx="1920240" cy="365760"/>
+          </a:xfrm>
+          <a:prstGeom prst="rect">
+            <a:avLst/>
+          </a:prstGeom>
+          <a:noFill/>
+        </p:spPr>
+        <p:txBody>
+          <a:bodyPr wrap="square" lIns="0" rIns="0" tIns="0" bIns="0" anchor="t">
+            <a:spAutoFit/>
+          </a:bodyPr>
+          <a:lstStyle/>
+          <a:p>
+            <a:pPr algn="ctr">
+              <a:lnSpc>
+                <a:spcPct val="112000"/>
+              </a:lnSpc>
+              <a:spcAft>
+                <a:spcPts val="300"/>
+              </a:spcAft>
+            </a:pPr>
+            <a:r>
+              <a:rPr sz="1150" b="0">
+                <a:solidFill>
+                  <a:srgbClr val="6B6258"/>
+                </a:solidFill>
+                <a:latin typeface="Microsoft JhengHei"/>
+              </a:rPr>
+              <a:t>草稿轉正式</a:t>
+            </a:r>
+          </a:p>
+        </p:txBody>
+      </p:sp>
+      <p:sp>
+        <p:nvSpPr>
+          <p:cNvPr id="10" name="Chevron 9"/>
+          <p:cNvSpPr/>
+          <p:nvPr/>
+        </p:nvSpPr>
+        <p:spPr>
+          <a:xfrm>
+            <a:off x="6035040" y="1481328"/>
+            <a:ext cx="2606040" cy="1170432"/>
+          </a:xfrm>
+          <a:prstGeom prst="chevron">
+            <a:avLst/>
+          </a:prstGeom>
+          <a:solidFill>
+            <a:srgbClr val="EADBD3"/>
+          </a:solidFill>
+          <a:ln>
+            <a:noFill/>
+          </a:ln>
+          <a:effectLst/>
+        </p:spPr>
+        <p:style>
+          <a:lnRef idx="1">
+            <a:schemeClr val="accent1"/>
+          </a:lnRef>
+          <a:fillRef idx="3">
+            <a:schemeClr val="accent1"/>
+          </a:fillRef>
+          <a:effectRef idx="2">
+            <a:schemeClr val="accent1"/>
+          </a:effectRef>
+          <a:fontRef idx="minor">
+            <a:schemeClr val="lt1"/>
+          </a:fontRef>
+        </p:style>
+        <p:txBody>
+          <a:bodyPr rtlCol="0" anchor="ctr"/>
+          <a:lstStyle/>
+          <a:p>
+            <a:pPr algn="ctr"/>
+          </a:p>
+        </p:txBody>
+      </p:sp>
+      <p:sp>
+        <p:nvSpPr>
+          <p:cNvPr id="11" name="TextBox 10"/>
+          <p:cNvSpPr txBox="1"/>
+          <p:nvPr/>
+        </p:nvSpPr>
+        <p:spPr>
+          <a:xfrm>
+            <a:off x="6419088" y="1645920"/>
+            <a:ext cx="1920240" cy="384048"/>
+          </a:xfrm>
+          <a:prstGeom prst="rect">
+            <a:avLst/>
+          </a:prstGeom>
+          <a:noFill/>
+        </p:spPr>
+        <p:txBody>
+          <a:bodyPr wrap="square" lIns="0" rIns="0" tIns="0" bIns="0" anchor="t">
+            <a:spAutoFit/>
+          </a:bodyPr>
+          <a:lstStyle/>
+          <a:p>
+            <a:pPr algn="ctr">
+              <a:lnSpc>
+                <a:spcPct val="112000"/>
+              </a:lnSpc>
+              <a:spcAft>
+                <a:spcPts val="300"/>
+              </a:spcAft>
+            </a:pPr>
+            <a:r>
+              <a:rPr sz="1550" b="1">
+                <a:solidFill>
+                  <a:srgbClr val="2B2420"/>
+                </a:solidFill>
+                <a:latin typeface="Microsoft JhengHei"/>
+              </a:rPr>
+              <a:t>排整卷章綱</a:t>
+            </a:r>
+          </a:p>
+        </p:txBody>
+      </p:sp>
+      <p:sp>
+        <p:nvSpPr>
+          <p:cNvPr id="12" name="TextBox 11"/>
+          <p:cNvSpPr txBox="1"/>
+          <p:nvPr/>
+        </p:nvSpPr>
+        <p:spPr>
+          <a:xfrm>
+            <a:off x="6419088" y="2048256"/>
+            <a:ext cx="1920240" cy="365760"/>
+          </a:xfrm>
+          <a:prstGeom prst="rect">
+            <a:avLst/>
+          </a:prstGeom>
+          <a:noFill/>
+        </p:spPr>
+        <p:txBody>
+          <a:bodyPr wrap="square" lIns="0" rIns="0" tIns="0" bIns="0" anchor="t">
+            <a:spAutoFit/>
+          </a:bodyPr>
+          <a:lstStyle/>
+          <a:p>
+            <a:pPr algn="ctr">
+              <a:lnSpc>
+                <a:spcPct val="112000"/>
+              </a:lnSpc>
+              <a:spcAft>
+                <a:spcPts val="300"/>
+              </a:spcAft>
+            </a:pPr>
+            <a:r>
+              <a:rPr sz="1150" b="0">
+                <a:solidFill>
+                  <a:srgbClr val="6B6258"/>
+                </a:solidFill>
+                <a:latin typeface="Microsoft JhengHei"/>
+              </a:rPr>
+              <a:t>一次 10 章，含四問</a:t>
+            </a:r>
+          </a:p>
+        </p:txBody>
+      </p:sp>
+      <p:sp>
+        <p:nvSpPr>
+          <p:cNvPr id="13" name="Chevron 12"/>
+          <p:cNvSpPr/>
+          <p:nvPr/>
+        </p:nvSpPr>
+        <p:spPr>
+          <a:xfrm>
+            <a:off x="8778240" y="1481328"/>
+            <a:ext cx="2606040" cy="1170432"/>
+          </a:xfrm>
+          <a:prstGeom prst="chevron">
+            <a:avLst/>
+          </a:prstGeom>
+          <a:solidFill>
+            <a:srgbClr val="3E6B5A"/>
+          </a:solidFill>
+          <a:ln>
+            <a:noFill/>
+          </a:ln>
+          <a:effectLst/>
+        </p:spPr>
+        <p:style>
+          <a:lnRef idx="1">
+            <a:schemeClr val="accent1"/>
+          </a:lnRef>
+          <a:fillRef idx="3">
+            <a:schemeClr val="accent1"/>
+          </a:fillRef>
+          <a:effectRef idx="2">
+            <a:schemeClr val="accent1"/>
+          </a:effectRef>
+          <a:fontRef idx="minor">
+            <a:schemeClr val="lt1"/>
+          </a:fontRef>
+        </p:style>
+        <p:txBody>
+          <a:bodyPr rtlCol="0" anchor="ctr"/>
+          <a:lstStyle/>
+          <a:p>
+            <a:pPr algn="ctr"/>
+          </a:p>
+        </p:txBody>
+      </p:sp>
+      <p:sp>
+        <p:nvSpPr>
+          <p:cNvPr id="14" name="TextBox 13"/>
+          <p:cNvSpPr txBox="1"/>
+          <p:nvPr/>
+        </p:nvSpPr>
+        <p:spPr>
+          <a:xfrm>
+            <a:off x="9162288" y="1645920"/>
+            <a:ext cx="1920240" cy="384048"/>
+          </a:xfrm>
+          <a:prstGeom prst="rect">
+            <a:avLst/>
+          </a:prstGeom>
+          <a:noFill/>
+        </p:spPr>
+        <p:txBody>
+          <a:bodyPr wrap="square" lIns="0" rIns="0" tIns="0" bIns="0" anchor="t">
+            <a:spAutoFit/>
+          </a:bodyPr>
+          <a:lstStyle/>
+          <a:p>
+            <a:pPr algn="ctr">
+              <a:lnSpc>
+                <a:spcPct val="112000"/>
+              </a:lnSpc>
+              <a:spcAft>
+                <a:spcPts val="300"/>
+              </a:spcAft>
+            </a:pPr>
+            <a:r>
+              <a:rPr sz="1550" b="1">
+                <a:solidFill>
+                  <a:srgbClr val="FFFFFF"/>
+                </a:solidFill>
+                <a:latin typeface="Microsoft JhengHei"/>
+              </a:rPr>
+              <a:t>章綱體檢</a:t>
+            </a:r>
+          </a:p>
+        </p:txBody>
+      </p:sp>
+      <p:sp>
+        <p:nvSpPr>
+          <p:cNvPr id="15" name="TextBox 14"/>
+          <p:cNvSpPr txBox="1"/>
+          <p:nvPr/>
+        </p:nvSpPr>
+        <p:spPr>
+          <a:xfrm>
+            <a:off x="9162288" y="2048256"/>
+            <a:ext cx="1920240" cy="365760"/>
+          </a:xfrm>
+          <a:prstGeom prst="rect">
+            <a:avLst/>
+          </a:prstGeom>
+          <a:noFill/>
+        </p:spPr>
+        <p:txBody>
+          <a:bodyPr wrap="square" lIns="0" rIns="0" tIns="0" bIns="0" anchor="t">
+            <a:spAutoFit/>
+          </a:bodyPr>
+          <a:lstStyle/>
+          <a:p>
+            <a:pPr algn="ctr">
+              <a:lnSpc>
+                <a:spcPct val="112000"/>
+              </a:lnSpc>
+              <a:spcAft>
+                <a:spcPts val="300"/>
+              </a:spcAft>
+            </a:pPr>
+            <a:r>
+              <a:rPr sz="1150" b="0">
+                <a:solidFill>
+                  <a:srgbClr val="FFFFFF"/>
+                </a:solidFill>
+                <a:latin typeface="Microsoft JhengHei"/>
+              </a:rPr>
+              <a:t>提前登場／久別重逢</a:t>
+            </a:r>
+          </a:p>
+        </p:txBody>
+      </p:sp>
+      <p:sp>
+        <p:nvSpPr>
+          <p:cNvPr id="16" name="Rounded Rectangle 15"/>
+          <p:cNvSpPr/>
+          <p:nvPr/>
+        </p:nvSpPr>
+        <p:spPr>
+          <a:xfrm>
+            <a:off x="548640" y="3017520"/>
+            <a:ext cx="11091672" cy="1097280"/>
+          </a:xfrm>
+          <a:prstGeom prst="roundRect">
+            <a:avLst/>
+          </a:prstGeom>
+          <a:solidFill>
+            <a:srgbClr val="F3E6DF"/>
+          </a:solidFill>
+          <a:ln>
+            <a:noFill/>
+          </a:ln>
+          <a:effectLst/>
+        </p:spPr>
+        <p:style>
+          <a:lnRef idx="1">
+            <a:schemeClr val="accent1"/>
+          </a:lnRef>
+          <a:fillRef idx="3">
+            <a:schemeClr val="accent1"/>
+          </a:fillRef>
+          <a:effectRef idx="2">
+            <a:schemeClr val="accent1"/>
+          </a:effectRef>
+          <a:fontRef idx="minor">
+            <a:schemeClr val="lt1"/>
+          </a:fontRef>
+        </p:style>
+        <p:txBody>
+          <a:bodyPr rtlCol="0" anchor="ctr"/>
+          <a:lstStyle/>
+          <a:p>
+            <a:pPr algn="ctr"/>
+          </a:p>
+        </p:txBody>
+      </p:sp>
+      <p:sp>
+        <p:nvSpPr>
+          <p:cNvPr id="17" name="TextBox 16"/>
+          <p:cNvSpPr txBox="1"/>
+          <p:nvPr/>
+        </p:nvSpPr>
+        <p:spPr>
+          <a:xfrm>
+            <a:off x="822960" y="3154680"/>
+            <a:ext cx="10515600" cy="320040"/>
+          </a:xfrm>
+          <a:prstGeom prst="rect">
+            <a:avLst/>
+          </a:prstGeom>
+          <a:noFill/>
+        </p:spPr>
+        <p:txBody>
+          <a:bodyPr wrap="square" lIns="0" rIns="0" tIns="0" bIns="0" anchor="t">
+            <a:spAutoFit/>
+          </a:bodyPr>
+          <a:lstStyle/>
+          <a:p>
+            <a:pPr algn="l">
+              <a:lnSpc>
+                <a:spcPct val="112000"/>
+              </a:lnSpc>
+              <a:spcAft>
+                <a:spcPts val="300"/>
+              </a:spcAft>
+            </a:pPr>
+            <a:r>
+              <a:rPr sz="1400" b="1">
+                <a:solidFill>
+                  <a:srgbClr val="2B2420"/>
+                </a:solidFill>
+                <a:latin typeface="Microsoft JhengHei"/>
+              </a:rPr>
+              <a:t>工作台只認正式卷綱：大綱/（或 大綱/卷綱/）的 卷綱_第N卷.md、狀態「已確認」。</a:t>
+            </a:r>
+          </a:p>
+        </p:txBody>
+      </p:sp>
+      <p:sp>
+        <p:nvSpPr>
+          <p:cNvPr id="18" name="TextBox 17"/>
+          <p:cNvSpPr txBox="1"/>
+          <p:nvPr/>
+        </p:nvSpPr>
+        <p:spPr>
+          <a:xfrm>
+            <a:off x="822960" y="3529584"/>
+            <a:ext cx="10515600" cy="457200"/>
+          </a:xfrm>
+          <a:prstGeom prst="rect">
+            <a:avLst/>
+          </a:prstGeom>
+          <a:noFill/>
+        </p:spPr>
+        <p:txBody>
+          <a:bodyPr wrap="square" lIns="0" rIns="0" tIns="0" bIns="0" anchor="t">
+            <a:spAutoFit/>
+          </a:bodyPr>
+          <a:lstStyle/>
+          <a:p>
+            <a:pPr algn="l">
+              <a:lnSpc>
+                <a:spcPct val="112000"/>
+              </a:lnSpc>
+              <a:spcAft>
+                <a:spcPts val="300"/>
+              </a:spcAft>
+            </a:pPr>
+            <a:r>
+              <a:rPr sz="1250" b="0">
+                <a:solidFill>
+                  <a:srgbClr val="5A514A"/>
+                </a:solidFill>
+                <a:latin typeface="Microsoft JhengHei"/>
+              </a:rPr>
+              <a:t>卷綱範圍外的章節，整章自動會拒絕；續寫合約找不到對應卷時，不會退回第一卷。</a:t>
+            </a:r>
+          </a:p>
+        </p:txBody>
+      </p:sp>
+      <p:sp>
+        <p:nvSpPr>
+          <p:cNvPr id="19" name="Rounded Rectangle 18"/>
+          <p:cNvSpPr/>
+          <p:nvPr/>
+        </p:nvSpPr>
+        <p:spPr>
+          <a:xfrm>
+            <a:off x="548640" y="4297680"/>
+            <a:ext cx="11091672" cy="1417320"/>
+          </a:xfrm>
+          <a:prstGeom prst="roundRect">
+            <a:avLst/>
+          </a:prstGeom>
+          <a:solidFill>
+            <a:srgbClr val="FFFFFF"/>
+          </a:solidFill>
+          <a:ln w="9525">
+            <a:solidFill>
+              <a:srgbClr val="D9D1C7"/>
+            </a:solidFill>
+          </a:ln>
+          <a:effectLst/>
+        </p:spPr>
+        <p:style>
+          <a:lnRef idx="1">
+            <a:schemeClr val="accent1"/>
+          </a:lnRef>
+          <a:fillRef idx="3">
+            <a:schemeClr val="accent1"/>
+          </a:fillRef>
+          <a:effectRef idx="2">
+            <a:schemeClr val="accent1"/>
+          </a:effectRef>
+          <a:fontRef idx="minor">
+            <a:schemeClr val="lt1"/>
+          </a:fontRef>
+        </p:style>
+        <p:txBody>
+          <a:bodyPr rtlCol="0" anchor="ctr"/>
+          <a:lstStyle/>
+          <a:p>
+            <a:pPr algn="ctr"/>
+          </a:p>
+        </p:txBody>
+      </p:sp>
+      <p:sp>
+        <p:nvSpPr>
+          <p:cNvPr id="20" name="TextBox 19"/>
+          <p:cNvSpPr txBox="1"/>
+          <p:nvPr/>
+        </p:nvSpPr>
+        <p:spPr>
+          <a:xfrm>
+            <a:off x="822960" y="4443984"/>
+            <a:ext cx="2743200" cy="292608"/>
+          </a:xfrm>
+          <a:prstGeom prst="rect">
+            <a:avLst/>
+          </a:prstGeom>
+          <a:noFill/>
+        </p:spPr>
+        <p:txBody>
+          <a:bodyPr wrap="square" lIns="0" rIns="0" tIns="0" bIns="0" anchor="t">
+            <a:spAutoFit/>
+          </a:bodyPr>
+          <a:lstStyle/>
+          <a:p>
+            <a:pPr algn="l">
+              <a:lnSpc>
+                <a:spcPct val="112000"/>
+              </a:lnSpc>
+              <a:spcAft>
+                <a:spcPts val="300"/>
+              </a:spcAft>
+            </a:pPr>
+            <a:r>
+              <a:rPr sz="1400" b="1">
+                <a:solidFill>
+                  <a:srgbClr val="8A3B2E"/>
+                </a:solidFill>
+                <a:latin typeface="Microsoft JhengHei"/>
+              </a:rPr>
+              <a:t>哪裡按</a:t>
+            </a:r>
+          </a:p>
+        </p:txBody>
+      </p:sp>
+      <p:sp>
+        <p:nvSpPr>
+          <p:cNvPr id="21" name="TextBox 20"/>
+          <p:cNvSpPr txBox="1"/>
+          <p:nvPr/>
+        </p:nvSpPr>
+        <p:spPr>
+          <a:xfrm>
+            <a:off x="822960" y="4773168"/>
+            <a:ext cx="10515600" cy="320040"/>
+          </a:xfrm>
+          <a:prstGeom prst="rect">
+            <a:avLst/>
+          </a:prstGeom>
+          <a:noFill/>
+        </p:spPr>
+        <p:txBody>
+          <a:bodyPr wrap="square" lIns="0" rIns="0" tIns="0" bIns="0" anchor="t">
+            <a:spAutoFit/>
+          </a:bodyPr>
+          <a:lstStyle/>
+          <a:p>
+            <a:pPr algn="l">
+              <a:lnSpc>
+                <a:spcPct val="112000"/>
+              </a:lnSpc>
+              <a:spcAft>
+                <a:spcPts val="300"/>
+              </a:spcAft>
+            </a:pPr>
+            <a:r>
+              <a:rPr sz="1300" b="0">
+                <a:solidFill>
+                  <a:srgbClr val="2B2420"/>
+                </a:solidFill>
+                <a:latin typeface="Microsoft JhengHei"/>
+              </a:rPr>
+              <a:t>大綱 → 卷況 → 開新卷 → 產生卷綱草稿 → 採用 → 排這一卷的章綱</a:t>
+            </a:r>
+          </a:p>
+        </p:txBody>
+      </p:sp>
+      <p:sp>
+        <p:nvSpPr>
+          <p:cNvPr id="22" name="TextBox 21"/>
+          <p:cNvSpPr txBox="1"/>
+          <p:nvPr/>
+        </p:nvSpPr>
+        <p:spPr>
+          <a:xfrm>
+            <a:off x="822960" y="5193792"/>
+            <a:ext cx="10515600" cy="365760"/>
+          </a:xfrm>
+          <a:prstGeom prst="rect">
+            <a:avLst/>
+          </a:prstGeom>
+          <a:noFill/>
+        </p:spPr>
+        <p:txBody>
+          <a:bodyPr wrap="square" lIns="0" rIns="0" tIns="0" bIns="0" anchor="t">
+            <a:spAutoFit/>
+          </a:bodyPr>
+          <a:lstStyle/>
+          <a:p>
+            <a:pPr algn="l">
+              <a:lnSpc>
+                <a:spcPct val="112000"/>
+              </a:lnSpc>
+              <a:spcAft>
+                <a:spcPts val="300"/>
+              </a:spcAft>
+            </a:pPr>
+            <a:r>
+              <a:rPr sz="1200" b="0">
+                <a:solidFill>
+                  <a:srgbClr val="6B6258"/>
+                </a:solidFill>
+                <a:latin typeface="Microsoft JhengHei"/>
+              </a:rPr>
+              <a:t>章綱體檢會列出哪一章的哪個角色提前登場；「禁止事項」不算登場。</a:t>
+            </a:r>
+          </a:p>
+        </p:txBody>
+      </p:sp>
+      <p:sp>
+        <p:nvSpPr>
+          <p:cNvPr id="23" name="TextBox 22"/>
+          <p:cNvSpPr txBox="1"/>
+          <p:nvPr/>
+        </p:nvSpPr>
+        <p:spPr>
+          <a:xfrm>
+            <a:off x="548640" y="5943600"/>
+            <a:ext cx="11064240" cy="320040"/>
+          </a:xfrm>
+          <a:prstGeom prst="rect">
+            <a:avLst/>
+          </a:prstGeom>
+          <a:noFill/>
+        </p:spPr>
+        <p:txBody>
+          <a:bodyPr wrap="square" lIns="0" rIns="0" tIns="0" bIns="0" anchor="t">
+            <a:spAutoFit/>
+          </a:bodyPr>
+          <a:lstStyle/>
+          <a:p>
+            <a:pPr algn="l">
+              <a:lnSpc>
+                <a:spcPct val="112000"/>
+              </a:lnSpc>
+              <a:spcAft>
+                <a:spcPts val="300"/>
+              </a:spcAft>
+            </a:pPr>
+            <a:r>
+              <a:rPr sz="1200" b="0">
+                <a:solidFill>
+                  <a:srgbClr val="6B6258"/>
+                </a:solidFill>
+                <a:latin typeface="Microsoft JhengHei"/>
+              </a:rPr>
+              <a:t>先有邊界，再寫細節；第一卷排 60 章也沒問題。</a:t>
+            </a:r>
+          </a:p>
+        </p:txBody>
+      </p:sp>
+    </p:spTree>
+  </p:cSld>
+  <p:clrMapOvr>
+    <a:masterClrMapping/>
+  </p:clrMapOvr>
+</p:sld>
+</file>
+
+<file path=ppt/slides/slide24.xml><?xml version="1.0" encoding="utf-8"?>
+<p:sld xmlns:a="http://schemas.openxmlformats.org/drawingml/2006/main" xmlns:p="http://schemas.openxmlformats.org/presentationml/2006/main" xmlns:r="http://schemas.openxmlformats.org/officeDocument/2006/relationships">
+  <p:cSld>
+    <p:spTree>
+      <p:nvGrpSpPr>
+        <p:cNvPr id="1" name=""/>
+        <p:cNvGrpSpPr/>
+        <p:nvPr/>
+      </p:nvGrpSpPr>
+      <p:grpSpPr/>
+      <p:sp>
+        <p:nvSpPr>
+          <p:cNvPr id="2" name="Title 1"/>
+          <p:cNvSpPr>
+            <a:spLocks noGrp="1"/>
+          </p:cNvSpPr>
+          <p:nvPr>
+            <p:ph type="title" idx="100"/>
+          </p:nvPr>
+        </p:nvSpPr>
+        <p:spPr/>
+        <p:txBody>
+          <a:bodyPr/>
+          <a:lstStyle/>
+          <a:p>
+            <a:r>
+              <a:t>設定集：生成、合併、安全刪除</a:t>
+            </a:r>
+          </a:p>
+        </p:txBody>
+      </p:sp>
+      <p:sp>
+        <p:nvSpPr>
+          <p:cNvPr id="3" name="TextBox 2"/>
+          <p:cNvSpPr txBox="1"/>
+          <p:nvPr/>
+        </p:nvSpPr>
+        <p:spPr>
+          <a:xfrm>
+            <a:off x="548640" y="1024128"/>
+            <a:ext cx="11064240" cy="310896"/>
+          </a:xfrm>
+          <a:prstGeom prst="rect">
+            <a:avLst/>
+          </a:prstGeom>
+          <a:noFill/>
+        </p:spPr>
+        <p:txBody>
+          <a:bodyPr wrap="square" lIns="0" rIns="0" tIns="0" bIns="0" anchor="t">
+            <a:spAutoFit/>
+          </a:bodyPr>
+          <a:lstStyle/>
+          <a:p>
+            <a:pPr algn="l">
+              <a:lnSpc>
+                <a:spcPct val="112000"/>
+              </a:lnSpc>
+              <a:spcAft>
+                <a:spcPts val="300"/>
+              </a:spcAft>
+            </a:pPr>
+            <a:r>
+              <a:rPr sz="1300" b="0">
+                <a:solidFill>
+                  <a:srgbClr val="6B6258"/>
+                </a:solidFill>
+                <a:latin typeface="Microsoft JhengHei"/>
+              </a:rPr>
+              <a:t>設定不是背景資料，是寫稿時真的會被讀進去的上下文</a:t>
+            </a:r>
+          </a:p>
+        </p:txBody>
+      </p:sp>
+      <p:sp>
+        <p:nvSpPr>
+          <p:cNvPr id="4" name="Rounded Rectangle 3"/>
+          <p:cNvSpPr/>
+          <p:nvPr/>
+        </p:nvSpPr>
+        <p:spPr>
+          <a:xfrm>
+            <a:off x="548640" y="1508760"/>
+            <a:ext cx="3566160" cy="3063240"/>
+          </a:xfrm>
+          <a:prstGeom prst="roundRect">
+            <a:avLst/>
+          </a:prstGeom>
+          <a:solidFill>
+            <a:srgbClr val="F3E6DF"/>
+          </a:solidFill>
+          <a:ln>
+            <a:noFill/>
+          </a:ln>
+          <a:effectLst/>
+        </p:spPr>
+        <p:style>
+          <a:lnRef idx="1">
+            <a:schemeClr val="accent1"/>
+          </a:lnRef>
+          <a:fillRef idx="3">
+            <a:schemeClr val="accent1"/>
+          </a:fillRef>
+          <a:effectRef idx="2">
+            <a:schemeClr val="accent1"/>
+          </a:effectRef>
+          <a:fontRef idx="minor">
+            <a:schemeClr val="lt1"/>
+          </a:fontRef>
+        </p:style>
+        <p:txBody>
+          <a:bodyPr rtlCol="0" anchor="ctr"/>
+          <a:lstStyle/>
+          <a:p>
+            <a:pPr algn="ctr"/>
+          </a:p>
+        </p:txBody>
+      </p:sp>
+      <p:sp>
+        <p:nvSpPr>
+          <p:cNvPr id="5" name="Oval 4"/>
+          <p:cNvSpPr/>
+          <p:nvPr/>
+        </p:nvSpPr>
+        <p:spPr>
+          <a:xfrm>
+            <a:off x="822959" y="1755648"/>
+            <a:ext cx="502920" cy="502920"/>
+          </a:xfrm>
+          <a:prstGeom prst="ellipse">
+            <a:avLst/>
+          </a:prstGeom>
+          <a:solidFill>
+            <a:srgbClr val="8A3B2E"/>
+          </a:solidFill>
+          <a:ln>
+            <a:noFill/>
+          </a:ln>
+        </p:spPr>
+        <p:style>
+          <a:lnRef idx="1">
+            <a:schemeClr val="accent1"/>
+          </a:lnRef>
+          <a:fillRef idx="3">
+            <a:schemeClr val="accent1"/>
+          </a:fillRef>
+          <a:effectRef idx="2">
+            <a:schemeClr val="accent1"/>
+          </a:effectRef>
+          <a:fontRef idx="minor">
+            <a:schemeClr val="lt1"/>
+          </a:fontRef>
+        </p:style>
+        <p:txBody>
+          <a:bodyPr rtlCol="0" anchor="ctr" lIns="0" rIns="0" tIns="0" bIns="0"/>
+          <a:lstStyle/>
+          <a:p>
+            <a:pPr algn="ctr"/>
+            <a:r>
+              <a:rPr sz="1700" b="1">
+                <a:solidFill>
+                  <a:srgbClr val="FFFFFF"/>
+                </a:solidFill>
+                <a:latin typeface="Microsoft JhengHei"/>
+              </a:rPr>
+              <a:t>1</a:t>
+            </a:r>
+          </a:p>
+        </p:txBody>
+      </p:sp>
+      <p:sp>
+        <p:nvSpPr>
+          <p:cNvPr id="6" name="TextBox 5"/>
+          <p:cNvSpPr txBox="1"/>
+          <p:nvPr/>
+        </p:nvSpPr>
+        <p:spPr>
+          <a:xfrm>
+            <a:off x="1444752" y="1783080"/>
+            <a:ext cx="2468880" cy="411480"/>
+          </a:xfrm>
+          <a:prstGeom prst="rect">
+            <a:avLst/>
+          </a:prstGeom>
+          <a:noFill/>
+        </p:spPr>
+        <p:txBody>
+          <a:bodyPr wrap="square" lIns="0" rIns="0" tIns="0" bIns="0" anchor="t">
+            <a:spAutoFit/>
+          </a:bodyPr>
+          <a:lstStyle/>
+          <a:p>
+            <a:pPr algn="l">
+              <a:lnSpc>
+                <a:spcPct val="112000"/>
+              </a:lnSpc>
+              <a:spcAft>
+                <a:spcPts val="300"/>
+              </a:spcAft>
+            </a:pPr>
+            <a:r>
+              <a:rPr sz="1700" b="1">
+                <a:solidFill>
+                  <a:srgbClr val="2B2420"/>
+                </a:solidFill>
+                <a:latin typeface="Microsoft JhengHei"/>
+              </a:rPr>
+              <a:t>從大綱長設定</a:t>
+            </a:r>
+          </a:p>
+        </p:txBody>
+      </p:sp>
+      <p:sp>
+        <p:nvSpPr>
+          <p:cNvPr id="7" name="TextBox 6"/>
+          <p:cNvSpPr txBox="1"/>
+          <p:nvPr/>
+        </p:nvSpPr>
+        <p:spPr>
+          <a:xfrm>
+            <a:off x="822959" y="2542032"/>
+            <a:ext cx="3017520" cy="1737360"/>
+          </a:xfrm>
+          <a:prstGeom prst="rect">
+            <a:avLst/>
+          </a:prstGeom>
+          <a:noFill/>
+        </p:spPr>
+        <p:txBody>
+          <a:bodyPr wrap="square" lIns="0" rIns="0" tIns="0" bIns="0" anchor="t">
+            <a:spAutoFit/>
+          </a:bodyPr>
+          <a:lstStyle/>
+          <a:p>
+            <a:pPr algn="l">
+              <a:lnSpc>
+                <a:spcPct val="120000"/>
+              </a:lnSpc>
+              <a:spcAft>
+                <a:spcPts val="500"/>
+              </a:spcAft>
+            </a:pPr>
+            <a:r>
+              <a:rPr sz="1250" b="0">
+                <a:solidFill>
+                  <a:srgbClr val="5A514A"/>
+                </a:solidFill>
+                <a:latin typeface="Microsoft JhengHei"/>
+              </a:rPr>
+              <a:t>讀大綱、卷綱、章綱，生成角色、勢力、世界觀草稿。</a:t>
+            </a:r>
+          </a:p>
+          <a:p>
+            <a:pPr algn="l">
+              <a:lnSpc>
+                <a:spcPct val="120000"/>
+              </a:lnSpc>
+              <a:spcAft>
+                <a:spcPts val="500"/>
+              </a:spcAft>
+            </a:pPr>
+            <a:r>
+              <a:rPr sz="1250" b="0">
+                <a:solidFill>
+                  <a:srgbClr val="5A514A"/>
+                </a:solidFill>
+                <a:latin typeface="Microsoft JhengHei"/>
+              </a:rPr>
+              <a:t>可填參考方向與參考網址；抓不到只註明，不擋流程。</a:t>
+            </a:r>
+          </a:p>
+        </p:txBody>
+      </p:sp>
+      <p:sp>
+        <p:nvSpPr>
+          <p:cNvPr id="8" name="Rounded Rectangle 7"/>
+          <p:cNvSpPr/>
+          <p:nvPr/>
+        </p:nvSpPr>
+        <p:spPr>
+          <a:xfrm>
+            <a:off x="4297679" y="1508760"/>
+            <a:ext cx="3566160" cy="3063240"/>
+          </a:xfrm>
+          <a:prstGeom prst="roundRect">
+            <a:avLst/>
+          </a:prstGeom>
+          <a:solidFill>
+            <a:srgbClr val="F3E6DF"/>
+          </a:solidFill>
+          <a:ln>
+            <a:noFill/>
+          </a:ln>
+          <a:effectLst/>
+        </p:spPr>
+        <p:style>
+          <a:lnRef idx="1">
+            <a:schemeClr val="accent1"/>
+          </a:lnRef>
+          <a:fillRef idx="3">
+            <a:schemeClr val="accent1"/>
+          </a:fillRef>
+          <a:effectRef idx="2">
+            <a:schemeClr val="accent1"/>
+          </a:effectRef>
+          <a:fontRef idx="minor">
+            <a:schemeClr val="lt1"/>
+          </a:fontRef>
+        </p:style>
+        <p:txBody>
+          <a:bodyPr rtlCol="0" anchor="ctr"/>
+          <a:lstStyle/>
+          <a:p>
+            <a:pPr algn="ctr"/>
+          </a:p>
+        </p:txBody>
+      </p:sp>
+      <p:sp>
+        <p:nvSpPr>
+          <p:cNvPr id="9" name="Oval 8"/>
+          <p:cNvSpPr/>
+          <p:nvPr/>
+        </p:nvSpPr>
+        <p:spPr>
+          <a:xfrm>
+            <a:off x="4571999" y="1755648"/>
+            <a:ext cx="502920" cy="502920"/>
+          </a:xfrm>
+          <a:prstGeom prst="ellipse">
+            <a:avLst/>
+          </a:prstGeom>
+          <a:solidFill>
+            <a:srgbClr val="8A3B2E"/>
+          </a:solidFill>
+          <a:ln>
+            <a:noFill/>
+          </a:ln>
+        </p:spPr>
+        <p:style>
+          <a:lnRef idx="1">
+            <a:schemeClr val="accent1"/>
+          </a:lnRef>
+          <a:fillRef idx="3">
+            <a:schemeClr val="accent1"/>
+          </a:fillRef>
+          <a:effectRef idx="2">
+            <a:schemeClr val="accent1"/>
+          </a:effectRef>
+          <a:fontRef idx="minor">
+            <a:schemeClr val="lt1"/>
+          </a:fontRef>
+        </p:style>
+        <p:txBody>
+          <a:bodyPr rtlCol="0" anchor="ctr" lIns="0" rIns="0" tIns="0" bIns="0"/>
+          <a:lstStyle/>
+          <a:p>
+            <a:pPr algn="ctr"/>
+            <a:r>
+              <a:rPr sz="1700" b="1">
+                <a:solidFill>
+                  <a:srgbClr val="FFFFFF"/>
+                </a:solidFill>
+                <a:latin typeface="Microsoft JhengHei"/>
+              </a:rPr>
+              <a:t>2</a:t>
+            </a:r>
+          </a:p>
+        </p:txBody>
+      </p:sp>
+      <p:sp>
+        <p:nvSpPr>
+          <p:cNvPr id="10" name="TextBox 9"/>
+          <p:cNvSpPr txBox="1"/>
+          <p:nvPr/>
+        </p:nvSpPr>
+        <p:spPr>
+          <a:xfrm>
+            <a:off x="5193792" y="1783080"/>
+            <a:ext cx="2468880" cy="411480"/>
+          </a:xfrm>
+          <a:prstGeom prst="rect">
+            <a:avLst/>
+          </a:prstGeom>
+          <a:noFill/>
+        </p:spPr>
+        <p:txBody>
+          <a:bodyPr wrap="square" lIns="0" rIns="0" tIns="0" bIns="0" anchor="t">
+            <a:spAutoFit/>
+          </a:bodyPr>
+          <a:lstStyle/>
+          <a:p>
+            <a:pPr algn="l">
+              <a:lnSpc>
+                <a:spcPct val="112000"/>
+              </a:lnSpc>
+              <a:spcAft>
+                <a:spcPts val="300"/>
+              </a:spcAft>
+            </a:pPr>
+            <a:r>
+              <a:rPr sz="1700" b="1">
+                <a:solidFill>
+                  <a:srgbClr val="2B2420"/>
+                </a:solidFill>
+                <a:latin typeface="Microsoft JhengHei"/>
+              </a:rPr>
+              <a:t>草稿轉正式／合併</a:t>
+            </a:r>
+          </a:p>
+        </p:txBody>
+      </p:sp>
+      <p:sp>
+        <p:nvSpPr>
+          <p:cNvPr id="11" name="TextBox 10"/>
+          <p:cNvSpPr txBox="1"/>
+          <p:nvPr/>
+        </p:nvSpPr>
+        <p:spPr>
+          <a:xfrm>
+            <a:off x="4571999" y="2542032"/>
+            <a:ext cx="3017520" cy="1737360"/>
+          </a:xfrm>
+          <a:prstGeom prst="rect">
+            <a:avLst/>
+          </a:prstGeom>
+          <a:noFill/>
+        </p:spPr>
+        <p:txBody>
+          <a:bodyPr wrap="square" lIns="0" rIns="0" tIns="0" bIns="0" anchor="t">
+            <a:spAutoFit/>
+          </a:bodyPr>
+          <a:lstStyle/>
+          <a:p>
+            <a:pPr algn="l">
+              <a:lnSpc>
+                <a:spcPct val="120000"/>
+              </a:lnSpc>
+              <a:spcAft>
+                <a:spcPts val="500"/>
+              </a:spcAft>
+            </a:pPr>
+            <a:r>
+              <a:rPr sz="1250" b="0">
+                <a:solidFill>
+                  <a:srgbClr val="5A514A"/>
+                </a:solidFill>
+                <a:latin typeface="Microsoft JhengHei"/>
+              </a:rPr>
+              <a:t>AI 生成的設定先放「草稿」，看過再轉正式。</a:t>
+            </a:r>
+          </a:p>
+          <a:p>
+            <a:pPr algn="l">
+              <a:lnSpc>
+                <a:spcPct val="120000"/>
+              </a:lnSpc>
+              <a:spcAft>
+                <a:spcPts val="500"/>
+              </a:spcAft>
+            </a:pPr>
+            <a:r>
+              <a:rPr sz="1250" b="0">
+                <a:solidFill>
+                  <a:srgbClr val="5A514A"/>
+                </a:solidFill>
+                <a:latin typeface="Microsoft JhengHei"/>
+              </a:rPr>
+              <a:t>疑似重複可合併；舊檔移到 設定/_已合併，不刪內容。</a:t>
+            </a:r>
+          </a:p>
+        </p:txBody>
+      </p:sp>
+      <p:sp>
+        <p:nvSpPr>
+          <p:cNvPr id="12" name="Rounded Rectangle 11"/>
+          <p:cNvSpPr/>
+          <p:nvPr/>
+        </p:nvSpPr>
+        <p:spPr>
+          <a:xfrm>
+            <a:off x="8046719" y="1508760"/>
+            <a:ext cx="3566160" cy="3063240"/>
+          </a:xfrm>
+          <a:prstGeom prst="roundRect">
+            <a:avLst/>
+          </a:prstGeom>
+          <a:solidFill>
+            <a:srgbClr val="F3E6DF"/>
+          </a:solidFill>
+          <a:ln>
+            <a:noFill/>
+          </a:ln>
+          <a:effectLst/>
+        </p:spPr>
+        <p:style>
+          <a:lnRef idx="1">
+            <a:schemeClr val="accent1"/>
+          </a:lnRef>
+          <a:fillRef idx="3">
+            <a:schemeClr val="accent1"/>
+          </a:fillRef>
+          <a:effectRef idx="2">
+            <a:schemeClr val="accent1"/>
+          </a:effectRef>
+          <a:fontRef idx="minor">
+            <a:schemeClr val="lt1"/>
+          </a:fontRef>
+        </p:style>
+        <p:txBody>
+          <a:bodyPr rtlCol="0" anchor="ctr"/>
+          <a:lstStyle/>
+          <a:p>
+            <a:pPr algn="ctr"/>
+          </a:p>
+        </p:txBody>
+      </p:sp>
+      <p:sp>
+        <p:nvSpPr>
+          <p:cNvPr id="13" name="Oval 12"/>
+          <p:cNvSpPr/>
+          <p:nvPr/>
+        </p:nvSpPr>
+        <p:spPr>
+          <a:xfrm>
+            <a:off x="8321040" y="1755648"/>
+            <a:ext cx="502920" cy="502920"/>
+          </a:xfrm>
+          <a:prstGeom prst="ellipse">
+            <a:avLst/>
+          </a:prstGeom>
+          <a:solidFill>
+            <a:srgbClr val="8A3B2E"/>
+          </a:solidFill>
+          <a:ln>
+            <a:noFill/>
+          </a:ln>
+        </p:spPr>
+        <p:style>
+          <a:lnRef idx="1">
+            <a:schemeClr val="accent1"/>
+          </a:lnRef>
+          <a:fillRef idx="3">
+            <a:schemeClr val="accent1"/>
+          </a:fillRef>
+          <a:effectRef idx="2">
+            <a:schemeClr val="accent1"/>
+          </a:effectRef>
+          <a:fontRef idx="minor">
+            <a:schemeClr val="lt1"/>
+          </a:fontRef>
+        </p:style>
+        <p:txBody>
+          <a:bodyPr rtlCol="0" anchor="ctr" lIns="0" rIns="0" tIns="0" bIns="0"/>
+          <a:lstStyle/>
+          <a:p>
+            <a:pPr algn="ctr"/>
+            <a:r>
+              <a:rPr sz="1700" b="1">
+                <a:solidFill>
+                  <a:srgbClr val="FFFFFF"/>
+                </a:solidFill>
+                <a:latin typeface="Microsoft JhengHei"/>
+              </a:rPr>
+              <a:t>3</a:t>
+            </a:r>
+          </a:p>
+        </p:txBody>
+      </p:sp>
+      <p:sp>
+        <p:nvSpPr>
+          <p:cNvPr id="14" name="TextBox 13"/>
+          <p:cNvSpPr txBox="1"/>
+          <p:nvPr/>
+        </p:nvSpPr>
+        <p:spPr>
+          <a:xfrm>
+            <a:off x="8942832" y="1783080"/>
+            <a:ext cx="2468880" cy="411480"/>
+          </a:xfrm>
+          <a:prstGeom prst="rect">
+            <a:avLst/>
+          </a:prstGeom>
+          <a:noFill/>
+        </p:spPr>
+        <p:txBody>
+          <a:bodyPr wrap="square" lIns="0" rIns="0" tIns="0" bIns="0" anchor="t">
+            <a:spAutoFit/>
+          </a:bodyPr>
+          <a:lstStyle/>
+          <a:p>
+            <a:pPr algn="l">
+              <a:lnSpc>
+                <a:spcPct val="112000"/>
+              </a:lnSpc>
+              <a:spcAft>
+                <a:spcPts val="300"/>
+              </a:spcAft>
+            </a:pPr>
+            <a:r>
+              <a:rPr sz="1700" b="1">
+                <a:solidFill>
+                  <a:srgbClr val="2B2420"/>
+                </a:solidFill>
+                <a:latin typeface="Microsoft JhengHei"/>
+              </a:rPr>
+              <a:t>安全刪除</a:t>
+            </a:r>
+          </a:p>
+        </p:txBody>
+      </p:sp>
+      <p:sp>
+        <p:nvSpPr>
+          <p:cNvPr id="15" name="TextBox 14"/>
+          <p:cNvSpPr txBox="1"/>
+          <p:nvPr/>
+        </p:nvSpPr>
+        <p:spPr>
+          <a:xfrm>
+            <a:off x="8321040" y="2542032"/>
+            <a:ext cx="3017520" cy="1737360"/>
+          </a:xfrm>
+          <a:prstGeom prst="rect">
+            <a:avLst/>
+          </a:prstGeom>
+          <a:noFill/>
+        </p:spPr>
+        <p:txBody>
+          <a:bodyPr wrap="square" lIns="0" rIns="0" tIns="0" bIns="0" anchor="t">
+            <a:spAutoFit/>
+          </a:bodyPr>
+          <a:lstStyle/>
+          <a:p>
+            <a:pPr algn="l">
+              <a:lnSpc>
+                <a:spcPct val="120000"/>
+              </a:lnSpc>
+              <a:spcAft>
+                <a:spcPts val="500"/>
+              </a:spcAft>
+            </a:pPr>
+            <a:r>
+              <a:rPr sz="1250" b="0">
+                <a:solidFill>
+                  <a:srgbClr val="5A514A"/>
+                </a:solidFill>
+                <a:latin typeface="Microsoft JhengHei"/>
+              </a:rPr>
+              <a:t>選角色、勢力、世界觀或草稿，按「刪除這份」。</a:t>
+            </a:r>
+          </a:p>
+          <a:p>
+            <a:pPr algn="l">
+              <a:lnSpc>
+                <a:spcPct val="120000"/>
+              </a:lnSpc>
+              <a:spcAft>
+                <a:spcPts val="500"/>
+              </a:spcAft>
+            </a:pPr>
+            <a:r>
+              <a:rPr sz="1250" b="0">
+                <a:solidFill>
+                  <a:srgbClr val="5A514A"/>
+                </a:solidFill>
+                <a:latin typeface="Microsoft JhengHei"/>
+              </a:rPr>
+              <a:t>檔案移到 .studio/刪除，重建索引，不永久刪除。</a:t>
+            </a:r>
+          </a:p>
+        </p:txBody>
+      </p:sp>
+      <p:sp>
+        <p:nvSpPr>
+          <p:cNvPr id="16" name="Rounded Rectangle 15"/>
+          <p:cNvSpPr/>
+          <p:nvPr/>
+        </p:nvSpPr>
+        <p:spPr>
+          <a:xfrm>
+            <a:off x="548640" y="4846320"/>
+            <a:ext cx="11091672" cy="1234440"/>
+          </a:xfrm>
+          <a:prstGeom prst="roundRect">
+            <a:avLst/>
+          </a:prstGeom>
+          <a:solidFill>
+            <a:srgbClr val="EADBD3"/>
+          </a:solidFill>
+          <a:ln>
+            <a:noFill/>
+          </a:ln>
+          <a:effectLst/>
+        </p:spPr>
+        <p:style>
+          <a:lnRef idx="1">
+            <a:schemeClr val="accent1"/>
+          </a:lnRef>
+          <a:fillRef idx="3">
+            <a:schemeClr val="accent1"/>
+          </a:fillRef>
+          <a:effectRef idx="2">
+            <a:schemeClr val="accent1"/>
+          </a:effectRef>
+          <a:fontRef idx="minor">
+            <a:schemeClr val="lt1"/>
+          </a:fontRef>
+        </p:style>
+        <p:txBody>
+          <a:bodyPr rtlCol="0" anchor="ctr"/>
+          <a:lstStyle/>
+          <a:p>
+            <a:pPr algn="ctr"/>
+          </a:p>
+        </p:txBody>
+      </p:sp>
+      <p:sp>
+        <p:nvSpPr>
+          <p:cNvPr id="17" name="TextBox 16"/>
+          <p:cNvSpPr txBox="1"/>
+          <p:nvPr/>
+        </p:nvSpPr>
+        <p:spPr>
+          <a:xfrm>
+            <a:off x="822960" y="4983480"/>
+            <a:ext cx="10515600" cy="320040"/>
+          </a:xfrm>
+          <a:prstGeom prst="rect">
+            <a:avLst/>
+          </a:prstGeom>
+          <a:noFill/>
+        </p:spPr>
+        <p:txBody>
+          <a:bodyPr wrap="square" lIns="0" rIns="0" tIns="0" bIns="0" anchor="t">
+            <a:spAutoFit/>
+          </a:bodyPr>
+          <a:lstStyle/>
+          <a:p>
+            <a:pPr algn="l">
+              <a:lnSpc>
+                <a:spcPct val="112000"/>
+              </a:lnSpc>
+              <a:spcAft>
+                <a:spcPts val="300"/>
+              </a:spcAft>
+            </a:pPr>
+            <a:r>
+              <a:rPr sz="1400" b="1">
+                <a:solidFill>
+                  <a:srgbClr val="2B2420"/>
+                </a:solidFill>
+                <a:latin typeface="Microsoft JhengHei"/>
+              </a:rPr>
+              <a:t>生成的是草稿，不會自動進正式設定；看過再「草稿轉正式」。</a:t>
+            </a:r>
+          </a:p>
+        </p:txBody>
+      </p:sp>
+      <p:sp>
+        <p:nvSpPr>
+          <p:cNvPr id="18" name="TextBox 17"/>
+          <p:cNvSpPr txBox="1"/>
+          <p:nvPr/>
+        </p:nvSpPr>
+        <p:spPr>
+          <a:xfrm>
+            <a:off x="822960" y="5367528"/>
+            <a:ext cx="10515600" cy="548640"/>
+          </a:xfrm>
+          <a:prstGeom prst="rect">
+            <a:avLst/>
+          </a:prstGeom>
+          <a:noFill/>
+        </p:spPr>
+        <p:txBody>
+          <a:bodyPr wrap="square" lIns="0" rIns="0" tIns="0" bIns="0" anchor="t">
+            <a:spAutoFit/>
+          </a:bodyPr>
+          <a:lstStyle/>
+          <a:p>
+            <a:pPr algn="l">
+              <a:lnSpc>
+                <a:spcPct val="112000"/>
+              </a:lnSpc>
+              <a:spcAft>
+                <a:spcPts val="300"/>
+              </a:spcAft>
+            </a:pPr>
+            <a:r>
+              <a:rPr sz="1200" b="0">
+                <a:solidFill>
+                  <a:srgbClr val="6B6258"/>
+                </a:solidFill>
+                <a:latin typeface="Microsoft JhengHei"/>
+              </a:rPr>
+              <a:t>要清掉用「刪除這份」，檔案會移到 .studio/刪除/，不是永久刪除；故事核心、文風、名詞表、大綱、卷綱不給刪。</a:t>
+            </a:r>
+          </a:p>
+        </p:txBody>
+      </p:sp>
+    </p:spTree>
+  </p:cSld>
+  <p:clrMapOvr>
+    <a:masterClrMapping/>
+  </p:clrMapOvr>
+</p:sld>
+</file>
+
+<file path=ppt/slides/slide25.xml><?xml version="1.0" encoding="utf-8"?>
+<p:sld xmlns:a="http://schemas.openxmlformats.org/drawingml/2006/main" xmlns:p="http://schemas.openxmlformats.org/presentationml/2006/main" xmlns:r="http://schemas.openxmlformats.org/officeDocument/2006/relationships">
+  <p:cSld>
+    <p:spTree>
+      <p:nvGrpSpPr>
+        <p:cNvPr id="1" name=""/>
+        <p:cNvGrpSpPr/>
+        <p:nvPr/>
+      </p:nvGrpSpPr>
+      <p:grpSpPr/>
+      <p:sp>
+        <p:nvSpPr>
+          <p:cNvPr id="2" name="Title 1"/>
+          <p:cNvSpPr>
+            <a:spLocks noGrp="1"/>
+          </p:cNvSpPr>
+          <p:nvPr>
+            <p:ph type="title" idx="100"/>
+          </p:nvPr>
+        </p:nvSpPr>
+        <p:spPr/>
+        <p:txBody>
+          <a:bodyPr/>
+          <a:lstStyle/>
+          <a:p>
+            <a:r>
+              <a:t>長期連載的護欄：不讓第 50 章迷路</a:t>
+            </a:r>
+          </a:p>
+        </p:txBody>
+      </p:sp>
+      <p:sp>
+        <p:nvSpPr>
+          <p:cNvPr id="3" name="TextBox 2"/>
+          <p:cNvSpPr txBox="1"/>
+          <p:nvPr/>
+        </p:nvSpPr>
+        <p:spPr>
+          <a:xfrm>
+            <a:off x="548640" y="1024128"/>
+            <a:ext cx="11064240" cy="310896"/>
+          </a:xfrm>
+          <a:prstGeom prst="rect">
+            <a:avLst/>
+          </a:prstGeom>
+          <a:noFill/>
+        </p:spPr>
+        <p:txBody>
+          <a:bodyPr wrap="square" lIns="0" rIns="0" tIns="0" bIns="0" anchor="t">
+            <a:spAutoFit/>
+          </a:bodyPr>
+          <a:lstStyle/>
+          <a:p>
+            <a:pPr algn="l">
+              <a:lnSpc>
+                <a:spcPct val="112000"/>
+              </a:lnSpc>
+              <a:spcAft>
+                <a:spcPts val="300"/>
+              </a:spcAft>
+            </a:pPr>
+            <a:r>
+              <a:rPr sz="1300" b="0">
+                <a:solidFill>
+                  <a:srgbClr val="6B6258"/>
+                </a:solidFill>
+                <a:latin typeface="Microsoft JhengHei"/>
+              </a:rPr>
+              <a:t>靠的不是記憶力，是留下來的紀錄；多數是本機計算，需要判斷時才呼叫模型</a:t>
+            </a:r>
+          </a:p>
+        </p:txBody>
+      </p:sp>
+      <p:sp>
+        <p:nvSpPr>
+          <p:cNvPr id="4" name="Rounded Rectangle 3"/>
+          <p:cNvSpPr/>
+          <p:nvPr/>
+        </p:nvSpPr>
+        <p:spPr>
+          <a:xfrm>
+            <a:off x="548640" y="1508760"/>
+            <a:ext cx="5440680" cy="1874519"/>
+          </a:xfrm>
+          <a:prstGeom prst="roundRect">
+            <a:avLst/>
+          </a:prstGeom>
+          <a:solidFill>
+            <a:srgbClr val="F3E6DF"/>
+          </a:solidFill>
+          <a:ln>
+            <a:noFill/>
+          </a:ln>
+          <a:effectLst/>
+        </p:spPr>
+        <p:style>
+          <a:lnRef idx="1">
+            <a:schemeClr val="accent1"/>
+          </a:lnRef>
+          <a:fillRef idx="3">
+            <a:schemeClr val="accent1"/>
+          </a:fillRef>
+          <a:effectRef idx="2">
+            <a:schemeClr val="accent1"/>
+          </a:effectRef>
+          <a:fontRef idx="minor">
+            <a:schemeClr val="lt1"/>
+          </a:fontRef>
+        </p:style>
+        <p:txBody>
+          <a:bodyPr rtlCol="0" anchor="ctr"/>
+          <a:lstStyle/>
+          <a:p>
+            <a:pPr algn="ctr"/>
+          </a:p>
+        </p:txBody>
+      </p:sp>
+      <p:sp>
+        <p:nvSpPr>
+          <p:cNvPr id="5" name="TextBox 4"/>
+          <p:cNvSpPr txBox="1"/>
+          <p:nvPr/>
+        </p:nvSpPr>
+        <p:spPr>
+          <a:xfrm>
+            <a:off x="841247" y="1728216"/>
+            <a:ext cx="4846320" cy="365760"/>
+          </a:xfrm>
+          <a:prstGeom prst="rect">
+            <a:avLst/>
+          </a:prstGeom>
+          <a:noFill/>
+        </p:spPr>
+        <p:txBody>
+          <a:bodyPr wrap="square" lIns="0" rIns="0" tIns="0" bIns="0" anchor="t">
+            <a:spAutoFit/>
+          </a:bodyPr>
+          <a:lstStyle/>
+          <a:p>
+            <a:pPr algn="l">
+              <a:lnSpc>
+                <a:spcPct val="112000"/>
+              </a:lnSpc>
+              <a:spcAft>
+                <a:spcPts val="300"/>
+              </a:spcAft>
+            </a:pPr>
+            <a:r>
+              <a:rPr sz="1700" b="1">
+                <a:solidFill>
+                  <a:srgbClr val="8A3B2E"/>
+                </a:solidFill>
+                <a:latin typeface="Microsoft JhengHei"/>
+              </a:rPr>
+              <a:t>續寫合約</a:t>
+            </a:r>
+          </a:p>
+        </p:txBody>
+      </p:sp>
+      <p:sp>
+        <p:nvSpPr>
+          <p:cNvPr id="6" name="TextBox 5"/>
+          <p:cNvSpPr txBox="1"/>
+          <p:nvPr/>
+        </p:nvSpPr>
+        <p:spPr>
+          <a:xfrm>
+            <a:off x="841247" y="2221991"/>
+            <a:ext cx="4846320" cy="1005840"/>
+          </a:xfrm>
+          <a:prstGeom prst="rect">
+            <a:avLst/>
+          </a:prstGeom>
+          <a:noFill/>
+        </p:spPr>
+        <p:txBody>
+          <a:bodyPr wrap="square" lIns="0" rIns="0" tIns="0" bIns="0" anchor="t">
+            <a:spAutoFit/>
+          </a:bodyPr>
+          <a:lstStyle/>
+          <a:p>
+            <a:pPr algn="l">
+              <a:lnSpc>
+                <a:spcPct val="120000"/>
+              </a:lnSpc>
+              <a:spcAft>
+                <a:spcPts val="400"/>
+              </a:spcAft>
+            </a:pPr>
+            <a:r>
+              <a:rPr sz="1250" b="0">
+                <a:solidFill>
+                  <a:srgbClr val="5A514A"/>
+                </a:solidFill>
+                <a:latin typeface="Microsoft JhengHei"/>
+              </a:rPr>
+              <a:t>每章開頭注入目前章數、角色、未回收伏筆、卷末承諾；合約優先於大綱與文風。</a:t>
+            </a:r>
+          </a:p>
+        </p:txBody>
+      </p:sp>
+      <p:sp>
+        <p:nvSpPr>
+          <p:cNvPr id="7" name="Rounded Rectangle 6"/>
+          <p:cNvSpPr/>
+          <p:nvPr/>
+        </p:nvSpPr>
+        <p:spPr>
+          <a:xfrm>
+            <a:off x="6172200" y="1508760"/>
+            <a:ext cx="5440680" cy="1874519"/>
+          </a:xfrm>
+          <a:prstGeom prst="roundRect">
+            <a:avLst/>
+          </a:prstGeom>
+          <a:solidFill>
+            <a:srgbClr val="F3E6DF"/>
+          </a:solidFill>
+          <a:ln>
+            <a:noFill/>
+          </a:ln>
+          <a:effectLst/>
+        </p:spPr>
+        <p:style>
+          <a:lnRef idx="1">
+            <a:schemeClr val="accent1"/>
+          </a:lnRef>
+          <a:fillRef idx="3">
+            <a:schemeClr val="accent1"/>
+          </a:fillRef>
+          <a:effectRef idx="2">
+            <a:schemeClr val="accent1"/>
+          </a:effectRef>
+          <a:fontRef idx="minor">
+            <a:schemeClr val="lt1"/>
+          </a:fontRef>
+        </p:style>
+        <p:txBody>
+          <a:bodyPr rtlCol="0" anchor="ctr"/>
+          <a:lstStyle/>
+          <a:p>
+            <a:pPr algn="ctr"/>
+          </a:p>
+        </p:txBody>
+      </p:sp>
+      <p:sp>
+        <p:nvSpPr>
+          <p:cNvPr id="8" name="TextBox 7"/>
+          <p:cNvSpPr txBox="1"/>
+          <p:nvPr/>
+        </p:nvSpPr>
+        <p:spPr>
+          <a:xfrm>
+            <a:off x="6464808" y="1728216"/>
+            <a:ext cx="4846320" cy="365760"/>
+          </a:xfrm>
+          <a:prstGeom prst="rect">
+            <a:avLst/>
+          </a:prstGeom>
+          <a:noFill/>
+        </p:spPr>
+        <p:txBody>
+          <a:bodyPr wrap="square" lIns="0" rIns="0" tIns="0" bIns="0" anchor="t">
+            <a:spAutoFit/>
+          </a:bodyPr>
+          <a:lstStyle/>
+          <a:p>
+            <a:pPr algn="l">
+              <a:lnSpc>
+                <a:spcPct val="112000"/>
+              </a:lnSpc>
+              <a:spcAft>
+                <a:spcPts val="300"/>
+              </a:spcAft>
+            </a:pPr>
+            <a:r>
+              <a:rPr sz="1700" b="1">
+                <a:solidFill>
+                  <a:srgbClr val="8A3B2E"/>
+                </a:solidFill>
+                <a:latin typeface="Microsoft JhengHei"/>
+              </a:rPr>
+              <a:t>檢索式記憶</a:t>
+            </a:r>
+          </a:p>
+        </p:txBody>
+      </p:sp>
+      <p:sp>
+        <p:nvSpPr>
+          <p:cNvPr id="9" name="TextBox 8"/>
+          <p:cNvSpPr txBox="1"/>
+          <p:nvPr/>
+        </p:nvSpPr>
+        <p:spPr>
+          <a:xfrm>
+            <a:off x="6464808" y="2221991"/>
+            <a:ext cx="4846320" cy="1005840"/>
+          </a:xfrm>
+          <a:prstGeom prst="rect">
+            <a:avLst/>
+          </a:prstGeom>
+          <a:noFill/>
+        </p:spPr>
+        <p:txBody>
+          <a:bodyPr wrap="square" lIns="0" rIns="0" tIns="0" bIns="0" anchor="t">
+            <a:spAutoFit/>
+          </a:bodyPr>
+          <a:lstStyle/>
+          <a:p>
+            <a:pPr algn="l">
+              <a:lnSpc>
+                <a:spcPct val="120000"/>
+              </a:lnSpc>
+              <a:spcAft>
+                <a:spcPts val="400"/>
+              </a:spcAft>
+            </a:pPr>
+            <a:r>
+              <a:rPr sz="1250" b="0">
+                <a:solidFill>
+                  <a:srgbClr val="5A514A"/>
+                </a:solidFill>
+                <a:latin typeface="Microsoft JhengHei"/>
+              </a:rPr>
+              <a:t>從前面章節找相關段落，只帶需要的；上下文大約多 2%，不是整本重讀。</a:t>
+            </a:r>
+          </a:p>
+        </p:txBody>
+      </p:sp>
+      <p:sp>
+        <p:nvSpPr>
+          <p:cNvPr id="10" name="Rounded Rectangle 9"/>
+          <p:cNvSpPr/>
+          <p:nvPr/>
+        </p:nvSpPr>
+        <p:spPr>
+          <a:xfrm>
+            <a:off x="548640" y="3611879"/>
+            <a:ext cx="5440680" cy="1874519"/>
+          </a:xfrm>
+          <a:prstGeom prst="roundRect">
+            <a:avLst/>
+          </a:prstGeom>
+          <a:solidFill>
+            <a:srgbClr val="F3E6DF"/>
+          </a:solidFill>
+          <a:ln>
+            <a:noFill/>
+          </a:ln>
+          <a:effectLst/>
+        </p:spPr>
+        <p:style>
+          <a:lnRef idx="1">
+            <a:schemeClr val="accent1"/>
+          </a:lnRef>
+          <a:fillRef idx="3">
+            <a:schemeClr val="accent1"/>
+          </a:fillRef>
+          <a:effectRef idx="2">
+            <a:schemeClr val="accent1"/>
+          </a:effectRef>
+          <a:fontRef idx="minor">
+            <a:schemeClr val="lt1"/>
+          </a:fontRef>
+        </p:style>
+        <p:txBody>
+          <a:bodyPr rtlCol="0" anchor="ctr"/>
+          <a:lstStyle/>
+          <a:p>
+            <a:pPr algn="ctr"/>
+          </a:p>
+        </p:txBody>
+      </p:sp>
+      <p:sp>
+        <p:nvSpPr>
+          <p:cNvPr id="11" name="TextBox 10"/>
+          <p:cNvSpPr txBox="1"/>
+          <p:nvPr/>
+        </p:nvSpPr>
+        <p:spPr>
+          <a:xfrm>
+            <a:off x="841247" y="3831335"/>
+            <a:ext cx="4846320" cy="365760"/>
+          </a:xfrm>
+          <a:prstGeom prst="rect">
+            <a:avLst/>
+          </a:prstGeom>
+          <a:noFill/>
+        </p:spPr>
+        <p:txBody>
+          <a:bodyPr wrap="square" lIns="0" rIns="0" tIns="0" bIns="0" anchor="t">
+            <a:spAutoFit/>
+          </a:bodyPr>
+          <a:lstStyle/>
+          <a:p>
+            <a:pPr algn="l">
+              <a:lnSpc>
+                <a:spcPct val="112000"/>
+              </a:lnSpc>
+              <a:spcAft>
+                <a:spcPts val="300"/>
+              </a:spcAft>
+            </a:pPr>
+            <a:r>
+              <a:rPr sz="1700" b="1">
+                <a:solidFill>
+                  <a:srgbClr val="8A3B2E"/>
+                </a:solidFill>
+                <a:latin typeface="Microsoft JhengHei"/>
+              </a:rPr>
+              <a:t>文風閉環</a:t>
+            </a:r>
+          </a:p>
+        </p:txBody>
+      </p:sp>
+      <p:sp>
+        <p:nvSpPr>
+          <p:cNvPr id="12" name="TextBox 11"/>
+          <p:cNvSpPr txBox="1"/>
+          <p:nvPr/>
+        </p:nvSpPr>
+        <p:spPr>
+          <a:xfrm>
+            <a:off x="841247" y="4325112"/>
+            <a:ext cx="4846320" cy="1005840"/>
+          </a:xfrm>
+          <a:prstGeom prst="rect">
+            <a:avLst/>
+          </a:prstGeom>
+          <a:noFill/>
+        </p:spPr>
+        <p:txBody>
+          <a:bodyPr wrap="square" lIns="0" rIns="0" tIns="0" bIns="0" anchor="t">
+            <a:spAutoFit/>
+          </a:bodyPr>
+          <a:lstStyle/>
+          <a:p>
+            <a:pPr algn="l">
+              <a:lnSpc>
+                <a:spcPct val="120000"/>
+              </a:lnSpc>
+              <a:spcAft>
+                <a:spcPts val="400"/>
+              </a:spcAft>
+            </a:pPr>
+            <a:r>
+              <a:rPr sz="1250" b="0">
+                <a:solidFill>
+                  <a:srgbClr val="5A514A"/>
+                </a:solidFill>
+                <a:latin typeface="Microsoft JhengHei"/>
+              </a:rPr>
+              <a:t>13 項指標；偏離就重寫；去 AI 味後做保真檢查，名字、數字、對白不能被改掉。</a:t>
+            </a:r>
+          </a:p>
+        </p:txBody>
+      </p:sp>
+      <p:sp>
+        <p:nvSpPr>
+          <p:cNvPr id="13" name="Rounded Rectangle 12"/>
+          <p:cNvSpPr/>
+          <p:nvPr/>
+        </p:nvSpPr>
+        <p:spPr>
+          <a:xfrm>
+            <a:off x="6172200" y="3611879"/>
+            <a:ext cx="5440680" cy="1874519"/>
+          </a:xfrm>
+          <a:prstGeom prst="roundRect">
+            <a:avLst/>
+          </a:prstGeom>
+          <a:solidFill>
+            <a:srgbClr val="F3E6DF"/>
+          </a:solidFill>
+          <a:ln>
+            <a:noFill/>
+          </a:ln>
+          <a:effectLst/>
+        </p:spPr>
+        <p:style>
+          <a:lnRef idx="1">
+            <a:schemeClr val="accent1"/>
+          </a:lnRef>
+          <a:fillRef idx="3">
+            <a:schemeClr val="accent1"/>
+          </a:fillRef>
+          <a:effectRef idx="2">
+            <a:schemeClr val="accent1"/>
+          </a:effectRef>
+          <a:fontRef idx="minor">
+            <a:schemeClr val="lt1"/>
+          </a:fontRef>
+        </p:style>
+        <p:txBody>
+          <a:bodyPr rtlCol="0" anchor="ctr"/>
+          <a:lstStyle/>
+          <a:p>
+            <a:pPr algn="ctr"/>
+          </a:p>
+        </p:txBody>
+      </p:sp>
+      <p:sp>
+        <p:nvSpPr>
+          <p:cNvPr id="14" name="TextBox 13"/>
+          <p:cNvSpPr txBox="1"/>
+          <p:nvPr/>
+        </p:nvSpPr>
+        <p:spPr>
+          <a:xfrm>
+            <a:off x="6464808" y="3831335"/>
+            <a:ext cx="4846320" cy="365760"/>
+          </a:xfrm>
+          <a:prstGeom prst="rect">
+            <a:avLst/>
+          </a:prstGeom>
+          <a:noFill/>
+        </p:spPr>
+        <p:txBody>
+          <a:bodyPr wrap="square" lIns="0" rIns="0" tIns="0" bIns="0" anchor="t">
+            <a:spAutoFit/>
+          </a:bodyPr>
+          <a:lstStyle/>
+          <a:p>
+            <a:pPr algn="l">
+              <a:lnSpc>
+                <a:spcPct val="112000"/>
+              </a:lnSpc>
+              <a:spcAft>
+                <a:spcPts val="300"/>
+              </a:spcAft>
+            </a:pPr>
+            <a:r>
+              <a:rPr sz="1700" b="1">
+                <a:solidFill>
+                  <a:srgbClr val="8A3B2E"/>
+                </a:solidFill>
+                <a:latin typeface="Microsoft JhengHei"/>
+              </a:rPr>
+              <a:t>漂移與自動駕駛</a:t>
+            </a:r>
+          </a:p>
+        </p:txBody>
+      </p:sp>
+      <p:sp>
+        <p:nvSpPr>
+          <p:cNvPr id="15" name="TextBox 14"/>
+          <p:cNvSpPr txBox="1"/>
+          <p:nvPr/>
+        </p:nvSpPr>
+        <p:spPr>
+          <a:xfrm>
+            <a:off x="6464808" y="4325112"/>
+            <a:ext cx="4846320" cy="1005840"/>
+          </a:xfrm>
+          <a:prstGeom prst="rect">
+            <a:avLst/>
+          </a:prstGeom>
+          <a:noFill/>
+        </p:spPr>
+        <p:txBody>
+          <a:bodyPr wrap="square" lIns="0" rIns="0" tIns="0" bIns="0" anchor="t">
+            <a:spAutoFit/>
+          </a:bodyPr>
+          <a:lstStyle/>
+          <a:p>
+            <a:pPr algn="l">
+              <a:lnSpc>
+                <a:spcPct val="120000"/>
+              </a:lnSpc>
+              <a:spcAft>
+                <a:spcPts val="400"/>
+              </a:spcAft>
+            </a:pPr>
+            <a:r>
+              <a:rPr sz="1250" b="0">
+                <a:solidFill>
+                  <a:srgbClr val="5A514A"/>
+                </a:solidFill>
+                <a:latin typeface="Microsoft JhengHei"/>
+              </a:rPr>
+              <a:t>卷末體檢列出久未登場、伏筆欠帳、文風偏離；每 N 章停下來檢查，有問題就 paused。</a:t>
+            </a:r>
+          </a:p>
+        </p:txBody>
+      </p:sp>
+      <p:sp>
+        <p:nvSpPr>
+          <p:cNvPr id="16" name="Rounded Rectangle 15"/>
+          <p:cNvSpPr/>
+          <p:nvPr/>
+        </p:nvSpPr>
+        <p:spPr>
+          <a:xfrm>
+            <a:off x="548640" y="5669280"/>
+            <a:ext cx="11091672" cy="658368"/>
+          </a:xfrm>
+          <a:prstGeom prst="roundRect">
+            <a:avLst/>
+          </a:prstGeom>
+          <a:solidFill>
+            <a:srgbClr val="EADBD3"/>
+          </a:solidFill>
+          <a:ln>
+            <a:noFill/>
+          </a:ln>
+          <a:effectLst/>
+        </p:spPr>
+        <p:style>
+          <a:lnRef idx="1">
+            <a:schemeClr val="accent1"/>
+          </a:lnRef>
+          <a:fillRef idx="3">
+            <a:schemeClr val="accent1"/>
+          </a:fillRef>
+          <a:effectRef idx="2">
+            <a:schemeClr val="accent1"/>
+          </a:effectRef>
+          <a:fontRef idx="minor">
+            <a:schemeClr val="lt1"/>
+          </a:fontRef>
+        </p:style>
+        <p:txBody>
+          <a:bodyPr rtlCol="0" anchor="ctr"/>
+          <a:lstStyle/>
+          <a:p>
+            <a:pPr algn="ctr"/>
+          </a:p>
+        </p:txBody>
+      </p:sp>
+      <p:sp>
+        <p:nvSpPr>
+          <p:cNvPr id="17" name="TextBox 16"/>
+          <p:cNvSpPr txBox="1"/>
+          <p:nvPr/>
+        </p:nvSpPr>
+        <p:spPr>
+          <a:xfrm>
+            <a:off x="822960" y="5779008"/>
+            <a:ext cx="10515600" cy="365760"/>
+          </a:xfrm>
+          <a:prstGeom prst="rect">
+            <a:avLst/>
+          </a:prstGeom>
+          <a:noFill/>
+        </p:spPr>
+        <p:txBody>
+          <a:bodyPr wrap="square" lIns="0" rIns="0" tIns="0" bIns="0" anchor="t">
+            <a:spAutoFit/>
+          </a:bodyPr>
+          <a:lstStyle/>
+          <a:p>
+            <a:pPr algn="l">
+              <a:lnSpc>
+                <a:spcPct val="112000"/>
+              </a:lnSpc>
+              <a:spcAft>
+                <a:spcPts val="300"/>
+              </a:spcAft>
+            </a:pPr>
+            <a:r>
+              <a:rPr sz="1300" b="1">
+                <a:solidFill>
+                  <a:srgbClr val="2B2420"/>
+                </a:solidFill>
+                <a:latin typeface="Microsoft JhengHei"/>
+              </a:rPr>
+              <a:t>這些護欄多數是本機計算；只有需要判斷時才呼叫模型，不會每章重讀整本。</a:t>
+            </a:r>
           </a:p>
         </p:txBody>
       </p:sp>
@@ -12293,7 +15243,7 @@
                   <a:srgbClr val="5A514A"/>
                 </a:solidFill>
               </a:rPr>
-              <a:t>訪談、設定集、大綱、章綱</a:t>
+              <a:t>訪談或骨架、卷先行、章綱</a:t>
             </a:r>
             <a:endParaRPr lang="en-US" sz="1400" dirty="0"/>
           </a:p>
@@ -12487,7 +15437,7 @@
                   <a:srgbClr val="5A514A"/>
                 </a:solidFill>
               </a:rPr>
-              <a:t>候選稿、審查、修訂、整章自動</a:t>
+              <a:t>候選稿、文風檢查、整章自動</a:t>
             </a:r>
             <a:endParaRPr lang="en-US" sz="1400" dirty="0"/>
           </a:p>
@@ -12681,7 +15631,7 @@
                   <a:srgbClr val="5A514A"/>
                 </a:solidFill>
               </a:rPr>
-              <a:t>伏筆、時間線、搜尋、舊稿、匯出</a:t>
+              <a:t>設定集、伏筆、時間線、匯出</a:t>
             </a:r>
             <a:endParaRPr lang="en-US" sz="1400" dirty="0"/>
           </a:p>
@@ -12717,7 +15667,7 @@
                   <a:srgbClr val="5A514A"/>
                 </a:solidFill>
               </a:rPr>
-              <a:t>第一次用，建議先照 1 → 2 走完，再用示範書試寫一章。</a:t>
+              <a:t>第一次用，建議先照 1 → 2 走完，再用示範書試寫一章；左側「說明」有完整圖文流程。</a:t>
             </a:r>
             <a:endParaRPr lang="en-US" sz="1600" dirty="0"/>
           </a:p>
@@ -15540,7 +18490,7 @@
                   <a:srgbClr val="5A514A"/>
                 </a:solidFill>
               </a:rPr>
-              <a:t>上面是這本書的頁面：總覽、章節、大綱、設定集、伏筆與時間線、任務紀錄、插圖、匯出。最下面是書架、共用庫、匯入舊稿、設定。</a:t>
+              <a:t>上面是這本書的頁面：總覽、章節、大綱、設定集、伏筆與時間線、任務紀錄、插圖、匯出。最下面是書架、共用庫、匯入舊稿、設定、說明。</a:t>
             </a:r>
             <a:endParaRPr lang="en-US" sz="1300" dirty="0"/>
           </a:p>
